--- a/PPT/presentation.pptx
+++ b/PPT/presentation.pptx
@@ -22,6 +22,8 @@
     <p:sldId id="267" r:id="rId17"/>
     <p:sldId id="268" r:id="rId18"/>
     <p:sldId id="269" r:id="rId19"/>
+    <p:sldId id="270" r:id="rId20"/>
+    <p:sldId id="271" r:id="rId21"/>
   </p:sldIdLst>
   <p:sldSz cy="6858000" cx="9144000"/>
   <p:notesSz cx="7559675" cy="10691800"/>
@@ -270,7 +272,7 @@
       </p15:sldGuideLst>
     </p:ext>
     <p:ext uri="GoogleSlidesCustomDataVersion2">
-      <go:slidesCustomData xmlns:go="http://customooxmlschemas.google.com/" r:id="rId20" roundtripDataSignature="AMtx7mj8wuJTCCbS05lGx88kMA9EIXFDzg=="/>
+      <go:slidesCustomData xmlns:go="http://customooxmlschemas.google.com/" r:id="rId22" roundtripDataSignature="AMtx7mhxalWeMWOu6bYiV/DXccZJz2+hMQ=="/>
     </p:ext>
   </p:extLst>
 </p:presentation>
@@ -1650,7 +1652,7 @@
   <p:cSld>
     <p:spTree>
       <p:nvGrpSpPr>
-        <p:cNvPr id="145" name="Shape 145"/>
+        <p:cNvPr id="144" name="Shape 144"/>
         <p:cNvGrpSpPr/>
         <p:nvPr/>
       </p:nvGrpSpPr>
@@ -1664,7 +1666,7 @@
       </p:grpSpPr>
       <p:sp>
         <p:nvSpPr>
-          <p:cNvPr id="146" name="Google Shape;146;g3e6813604e6_1_70:notes"/>
+          <p:cNvPr id="145" name="Google Shape;145;g3e6813604e6_1_61:notes"/>
           <p:cNvSpPr/>
           <p:nvPr>
             <p:ph idx="2" type="sldImg"/>
@@ -1699,7 +1701,7 @@
       </p:sp>
       <p:sp>
         <p:nvSpPr>
-          <p:cNvPr id="147" name="Google Shape;147;g3e6813604e6_1_70:notes"/>
+          <p:cNvPr id="146" name="Google Shape;146;g3e6813604e6_1_61:notes"/>
           <p:cNvSpPr txBox="1"/>
           <p:nvPr>
             <p:ph idx="1" type="body"/>
@@ -1738,7 +1740,7 @@
       </p:sp>
       <p:sp>
         <p:nvSpPr>
-          <p:cNvPr id="148" name="Google Shape;148;g3e6813604e6_1_70:notes"/>
+          <p:cNvPr id="147" name="Google Shape;147;g3e6813604e6_1_61:notes"/>
           <p:cNvSpPr txBox="1"/>
           <p:nvPr>
             <p:ph idx="12" type="sldNum"/>
@@ -1793,7 +1795,7 @@
   <p:cSld>
     <p:spTree>
       <p:nvGrpSpPr>
-        <p:cNvPr id="152" name="Shape 152"/>
+        <p:cNvPr id="151" name="Shape 151"/>
         <p:cNvGrpSpPr/>
         <p:nvPr/>
       </p:nvGrpSpPr>
@@ -1807,7 +1809,7 @@
       </p:grpSpPr>
       <p:sp>
         <p:nvSpPr>
-          <p:cNvPr id="153" name="Google Shape;153;g3e6813604e6_1_78:notes"/>
+          <p:cNvPr id="152" name="Google Shape;152;g3dae72e459a_0_9:notes"/>
           <p:cNvSpPr/>
           <p:nvPr>
             <p:ph idx="2" type="sldImg"/>
@@ -1842,7 +1844,7 @@
       </p:sp>
       <p:sp>
         <p:nvSpPr>
-          <p:cNvPr id="154" name="Google Shape;154;g3e6813604e6_1_78:notes"/>
+          <p:cNvPr id="153" name="Google Shape;153;g3dae72e459a_0_9:notes"/>
           <p:cNvSpPr txBox="1"/>
           <p:nvPr>
             <p:ph idx="1" type="body"/>
@@ -1881,7 +1883,7 @@
       </p:sp>
       <p:sp>
         <p:nvSpPr>
-          <p:cNvPr id="155" name="Google Shape;155;g3e6813604e6_1_78:notes"/>
+          <p:cNvPr id="154" name="Google Shape;154;g3dae72e459a_0_9:notes"/>
           <p:cNvSpPr txBox="1"/>
           <p:nvPr>
             <p:ph idx="12" type="sldNum"/>
@@ -1936,7 +1938,7 @@
   <p:cSld>
     <p:spTree>
       <p:nvGrpSpPr>
-        <p:cNvPr id="159" name="Shape 159"/>
+        <p:cNvPr id="157" name="Shape 157"/>
         <p:cNvGrpSpPr/>
         <p:nvPr/>
       </p:nvGrpSpPr>
@@ -1950,7 +1952,7 @@
       </p:grpSpPr>
       <p:sp>
         <p:nvSpPr>
-          <p:cNvPr id="160" name="Google Shape;160;g3e6813604e6_1_85:notes"/>
+          <p:cNvPr id="158" name="Google Shape;158;g3e6813604e6_1_70:notes"/>
           <p:cNvSpPr/>
           <p:nvPr>
             <p:ph idx="2" type="sldImg"/>
@@ -1985,7 +1987,7 @@
       </p:sp>
       <p:sp>
         <p:nvSpPr>
-          <p:cNvPr id="161" name="Google Shape;161;g3e6813604e6_1_85:notes"/>
+          <p:cNvPr id="159" name="Google Shape;159;g3e6813604e6_1_70:notes"/>
           <p:cNvSpPr txBox="1"/>
           <p:nvPr>
             <p:ph idx="1" type="body"/>
@@ -2024,7 +2026,7 @@
       </p:sp>
       <p:sp>
         <p:nvSpPr>
-          <p:cNvPr id="162" name="Google Shape;162;g3e6813604e6_1_85:notes"/>
+          <p:cNvPr id="160" name="Google Shape;160;g3e6813604e6_1_70:notes"/>
           <p:cNvSpPr txBox="1"/>
           <p:nvPr>
             <p:ph idx="12" type="sldNum"/>
@@ -2079,7 +2081,7 @@
   <p:cSld>
     <p:spTree>
       <p:nvGrpSpPr>
-        <p:cNvPr id="166" name="Shape 166"/>
+        <p:cNvPr id="164" name="Shape 164"/>
         <p:cNvGrpSpPr/>
         <p:nvPr/>
       </p:nvGrpSpPr>
@@ -2093,7 +2095,7 @@
       </p:grpSpPr>
       <p:sp>
         <p:nvSpPr>
-          <p:cNvPr id="167" name="Google Shape;167;g3e6813604e6_1_93:notes"/>
+          <p:cNvPr id="165" name="Google Shape;165;g3e6813604e6_1_78:notes"/>
           <p:cNvSpPr/>
           <p:nvPr>
             <p:ph idx="2" type="sldImg"/>
@@ -2128,7 +2130,7 @@
       </p:sp>
       <p:sp>
         <p:nvSpPr>
-          <p:cNvPr id="168" name="Google Shape;168;g3e6813604e6_1_93:notes"/>
+          <p:cNvPr id="166" name="Google Shape;166;g3e6813604e6_1_78:notes"/>
           <p:cNvSpPr txBox="1"/>
           <p:nvPr>
             <p:ph idx="1" type="body"/>
@@ -2167,7 +2169,7 @@
       </p:sp>
       <p:sp>
         <p:nvSpPr>
-          <p:cNvPr id="169" name="Google Shape;169;g3e6813604e6_1_93:notes"/>
+          <p:cNvPr id="167" name="Google Shape;167;g3e6813604e6_1_78:notes"/>
           <p:cNvSpPr txBox="1"/>
           <p:nvPr>
             <p:ph idx="12" type="sldNum"/>
@@ -2222,7 +2224,7 @@
   <p:cSld>
     <p:spTree>
       <p:nvGrpSpPr>
-        <p:cNvPr id="173" name="Shape 173"/>
+        <p:cNvPr id="171" name="Shape 171"/>
         <p:cNvGrpSpPr/>
         <p:nvPr/>
       </p:nvGrpSpPr>
@@ -2236,7 +2238,293 @@
       </p:grpSpPr>
       <p:sp>
         <p:nvSpPr>
-          <p:cNvPr id="174" name="Google Shape;174;p3:notes"/>
+          <p:cNvPr id="172" name="Google Shape;172;g3e6813604e6_1_85:notes"/>
+          <p:cNvSpPr/>
+          <p:nvPr>
+            <p:ph idx="2" type="sldImg"/>
+          </p:nvPr>
+        </p:nvSpPr>
+        <p:spPr>
+          <a:xfrm>
+            <a:off x="1374775" y="1336675"/>
+            <a:ext cx="4810200" cy="3608400"/>
+          </a:xfrm>
+          <a:custGeom>
+            <a:rect b="b" l="l" r="r" t="t"/>
+            <a:pathLst>
+              <a:path extrusionOk="0" h="120000" w="120000">
+                <a:moveTo>
+                  <a:pt x="0" y="0"/>
+                </a:moveTo>
+                <a:lnTo>
+                  <a:pt x="120000" y="0"/>
+                </a:lnTo>
+                <a:lnTo>
+                  <a:pt x="120000" y="120000"/>
+                </a:lnTo>
+                <a:lnTo>
+                  <a:pt x="0" y="120000"/>
+                </a:lnTo>
+                <a:close/>
+              </a:path>
+            </a:pathLst>
+          </a:custGeom>
+        </p:spPr>
+      </p:sp>
+      <p:sp>
+        <p:nvSpPr>
+          <p:cNvPr id="173" name="Google Shape;173;g3e6813604e6_1_85:notes"/>
+          <p:cNvSpPr txBox="1"/>
+          <p:nvPr>
+            <p:ph idx="1" type="body"/>
+          </p:nvPr>
+        </p:nvSpPr>
+        <p:spPr>
+          <a:xfrm>
+            <a:off x="755650" y="5145088"/>
+            <a:ext cx="6048300" cy="4210200"/>
+          </a:xfrm>
+          <a:prstGeom prst="rect">
+            <a:avLst/>
+          </a:prstGeom>
+        </p:spPr>
+        <p:txBody>
+          <a:bodyPr anchorCtr="0" anchor="t" bIns="45700" lIns="91425" spcFirstLastPara="1" rIns="91425" wrap="square" tIns="45700">
+            <a:noAutofit/>
+          </a:bodyPr>
+          <a:lstStyle/>
+          <a:p>
+            <a:pPr indent="0" lvl="0" marL="0" rtl="0" algn="l">
+              <a:spcBef>
+                <a:spcPts val="0"/>
+              </a:spcBef>
+              <a:spcAft>
+                <a:spcPts val="0"/>
+              </a:spcAft>
+              <a:buNone/>
+            </a:pPr>
+            <a:r>
+              <a:t/>
+            </a:r>
+            <a:endParaRPr/>
+          </a:p>
+        </p:txBody>
+      </p:sp>
+      <p:sp>
+        <p:nvSpPr>
+          <p:cNvPr id="174" name="Google Shape;174;g3e6813604e6_1_85:notes"/>
+          <p:cNvSpPr txBox="1"/>
+          <p:nvPr>
+            <p:ph idx="12" type="sldNum"/>
+          </p:nvPr>
+        </p:nvSpPr>
+        <p:spPr>
+          <a:xfrm>
+            <a:off x="4281488" y="10155238"/>
+            <a:ext cx="3276600" cy="536700"/>
+          </a:xfrm>
+          <a:prstGeom prst="rect">
+            <a:avLst/>
+          </a:prstGeom>
+        </p:spPr>
+        <p:txBody>
+          <a:bodyPr anchorCtr="0" anchor="b" bIns="45700" lIns="91425" spcFirstLastPara="1" rIns="91425" wrap="square" tIns="45700">
+            <a:noAutofit/>
+          </a:bodyPr>
+          <a:lstStyle/>
+          <a:p>
+            <a:pPr indent="0" lvl="0" marL="0" rtl="0" algn="r">
+              <a:spcBef>
+                <a:spcPts val="0"/>
+              </a:spcBef>
+              <a:spcAft>
+                <a:spcPts val="0"/>
+              </a:spcAft>
+              <a:buClr>
+                <a:srgbClr val="000000"/>
+              </a:buClr>
+              <a:buFont typeface="Arial"/>
+              <a:buNone/>
+            </a:pPr>
+            <a:fld id="{00000000-1234-1234-1234-123412341234}" type="slidenum">
+              <a:rPr lang="en-US"/>
+              <a:t>‹#›</a:t>
+            </a:fld>
+            <a:endParaRPr/>
+          </a:p>
+        </p:txBody>
+      </p:sp>
+    </p:spTree>
+  </p:cSld>
+  <p:clrMapOvr>
+    <a:masterClrMapping/>
+  </p:clrMapOvr>
+</p:notes>
+</file>
+
+<file path=ppt/notesSlides/notesSlide15.xml><?xml version="1.0" encoding="utf-8"?>
+<p:notes xmlns:a="http://schemas.openxmlformats.org/drawingml/2006/main" xmlns:r="http://schemas.openxmlformats.org/officeDocument/2006/relationships" xmlns:mc="http://schemas.openxmlformats.org/markup-compatibility/2006" xmlns:mv="urn:schemas-microsoft-com:mac:vml" xmlns:p="http://schemas.openxmlformats.org/presentationml/2006/main" xmlns:c="http://schemas.openxmlformats.org/drawingml/2006/chart" xmlns:dgm="http://schemas.openxmlformats.org/drawingml/2006/diagram" xmlns:o="urn:schemas-microsoft-com:office:office" xmlns:v="urn:schemas-microsoft-com:vml" xmlns:pvml="urn:schemas-microsoft-com:office:powerpoint" xmlns:com="http://schemas.openxmlformats.org/drawingml/2006/compatibility" xmlns:p14="http://schemas.microsoft.com/office/powerpoint/2010/main" xmlns:p15="http://schemas.microsoft.com/office/powerpoint/2012/main" xmlns:ahyp="http://schemas.microsoft.com/office/drawing/2018/hyperlinkcolor" showMasterPhAnim="0" showMasterSp="0">
+  <p:cSld>
+    <p:spTree>
+      <p:nvGrpSpPr>
+        <p:cNvPr id="178" name="Shape 178"/>
+        <p:cNvGrpSpPr/>
+        <p:nvPr/>
+      </p:nvGrpSpPr>
+      <p:grpSpPr>
+        <a:xfrm>
+          <a:off x="0" y="0"/>
+          <a:ext cx="0" cy="0"/>
+          <a:chOff x="0" y="0"/>
+          <a:chExt cx="0" cy="0"/>
+        </a:xfrm>
+      </p:grpSpPr>
+      <p:sp>
+        <p:nvSpPr>
+          <p:cNvPr id="179" name="Google Shape;179;g3e6813604e6_1_93:notes"/>
+          <p:cNvSpPr/>
+          <p:nvPr>
+            <p:ph idx="2" type="sldImg"/>
+          </p:nvPr>
+        </p:nvSpPr>
+        <p:spPr>
+          <a:xfrm>
+            <a:off x="1374775" y="1336675"/>
+            <a:ext cx="4810200" cy="3608400"/>
+          </a:xfrm>
+          <a:custGeom>
+            <a:rect b="b" l="l" r="r" t="t"/>
+            <a:pathLst>
+              <a:path extrusionOk="0" h="120000" w="120000">
+                <a:moveTo>
+                  <a:pt x="0" y="0"/>
+                </a:moveTo>
+                <a:lnTo>
+                  <a:pt x="120000" y="0"/>
+                </a:lnTo>
+                <a:lnTo>
+                  <a:pt x="120000" y="120000"/>
+                </a:lnTo>
+                <a:lnTo>
+                  <a:pt x="0" y="120000"/>
+                </a:lnTo>
+                <a:close/>
+              </a:path>
+            </a:pathLst>
+          </a:custGeom>
+        </p:spPr>
+      </p:sp>
+      <p:sp>
+        <p:nvSpPr>
+          <p:cNvPr id="180" name="Google Shape;180;g3e6813604e6_1_93:notes"/>
+          <p:cNvSpPr txBox="1"/>
+          <p:nvPr>
+            <p:ph idx="1" type="body"/>
+          </p:nvPr>
+        </p:nvSpPr>
+        <p:spPr>
+          <a:xfrm>
+            <a:off x="755650" y="5145088"/>
+            <a:ext cx="6048300" cy="4210200"/>
+          </a:xfrm>
+          <a:prstGeom prst="rect">
+            <a:avLst/>
+          </a:prstGeom>
+        </p:spPr>
+        <p:txBody>
+          <a:bodyPr anchorCtr="0" anchor="t" bIns="45700" lIns="91425" spcFirstLastPara="1" rIns="91425" wrap="square" tIns="45700">
+            <a:noAutofit/>
+          </a:bodyPr>
+          <a:lstStyle/>
+          <a:p>
+            <a:pPr indent="0" lvl="0" marL="0" rtl="0" algn="l">
+              <a:spcBef>
+                <a:spcPts val="0"/>
+              </a:spcBef>
+              <a:spcAft>
+                <a:spcPts val="0"/>
+              </a:spcAft>
+              <a:buNone/>
+            </a:pPr>
+            <a:r>
+              <a:t/>
+            </a:r>
+            <a:endParaRPr/>
+          </a:p>
+        </p:txBody>
+      </p:sp>
+      <p:sp>
+        <p:nvSpPr>
+          <p:cNvPr id="181" name="Google Shape;181;g3e6813604e6_1_93:notes"/>
+          <p:cNvSpPr txBox="1"/>
+          <p:nvPr>
+            <p:ph idx="12" type="sldNum"/>
+          </p:nvPr>
+        </p:nvSpPr>
+        <p:spPr>
+          <a:xfrm>
+            <a:off x="4281488" y="10155238"/>
+            <a:ext cx="3276600" cy="536700"/>
+          </a:xfrm>
+          <a:prstGeom prst="rect">
+            <a:avLst/>
+          </a:prstGeom>
+        </p:spPr>
+        <p:txBody>
+          <a:bodyPr anchorCtr="0" anchor="b" bIns="45700" lIns="91425" spcFirstLastPara="1" rIns="91425" wrap="square" tIns="45700">
+            <a:noAutofit/>
+          </a:bodyPr>
+          <a:lstStyle/>
+          <a:p>
+            <a:pPr indent="0" lvl="0" marL="0" rtl="0" algn="r">
+              <a:spcBef>
+                <a:spcPts val="0"/>
+              </a:spcBef>
+              <a:spcAft>
+                <a:spcPts val="0"/>
+              </a:spcAft>
+              <a:buClr>
+                <a:srgbClr val="000000"/>
+              </a:buClr>
+              <a:buFont typeface="Arial"/>
+              <a:buNone/>
+            </a:pPr>
+            <a:fld id="{00000000-1234-1234-1234-123412341234}" type="slidenum">
+              <a:rPr lang="en-US"/>
+              <a:t>‹#›</a:t>
+            </a:fld>
+            <a:endParaRPr/>
+          </a:p>
+        </p:txBody>
+      </p:sp>
+    </p:spTree>
+  </p:cSld>
+  <p:clrMapOvr>
+    <a:masterClrMapping/>
+  </p:clrMapOvr>
+</p:notes>
+</file>
+
+<file path=ppt/notesSlides/notesSlide16.xml><?xml version="1.0" encoding="utf-8"?>
+<p:notes xmlns:a="http://schemas.openxmlformats.org/drawingml/2006/main" xmlns:r="http://schemas.openxmlformats.org/officeDocument/2006/relationships" xmlns:mc="http://schemas.openxmlformats.org/markup-compatibility/2006" xmlns:mv="urn:schemas-microsoft-com:mac:vml" xmlns:p="http://schemas.openxmlformats.org/presentationml/2006/main" xmlns:c="http://schemas.openxmlformats.org/drawingml/2006/chart" xmlns:dgm="http://schemas.openxmlformats.org/drawingml/2006/diagram" xmlns:o="urn:schemas-microsoft-com:office:office" xmlns:v="urn:schemas-microsoft-com:vml" xmlns:pvml="urn:schemas-microsoft-com:office:powerpoint" xmlns:com="http://schemas.openxmlformats.org/drawingml/2006/compatibility" xmlns:p14="http://schemas.microsoft.com/office/powerpoint/2010/main" xmlns:p15="http://schemas.microsoft.com/office/powerpoint/2012/main" xmlns:ahyp="http://schemas.microsoft.com/office/drawing/2018/hyperlinkcolor" showMasterPhAnim="0" showMasterSp="0">
+  <p:cSld>
+    <p:spTree>
+      <p:nvGrpSpPr>
+        <p:cNvPr id="185" name="Shape 185"/>
+        <p:cNvGrpSpPr/>
+        <p:nvPr/>
+      </p:nvGrpSpPr>
+      <p:grpSpPr>
+        <a:xfrm>
+          <a:off x="0" y="0"/>
+          <a:ext cx="0" cy="0"/>
+          <a:chOff x="0" y="0"/>
+          <a:chExt cx="0" cy="0"/>
+        </a:xfrm>
+      </p:grpSpPr>
+      <p:sp>
+        <p:nvSpPr>
+          <p:cNvPr id="186" name="Google Shape;186;p3:notes"/>
           <p:cNvSpPr txBox="1"/>
           <p:nvPr>
             <p:ph idx="1" type="body"/>
@@ -2275,7 +2563,7 @@
       </p:sp>
       <p:sp>
         <p:nvSpPr>
-          <p:cNvPr id="175" name="Google Shape;175;p3:notes"/>
+          <p:cNvPr id="187" name="Google Shape;187;p3:notes"/>
           <p:cNvSpPr/>
           <p:nvPr>
             <p:ph idx="2" type="sldImg"/>
@@ -2863,7 +3151,7 @@
       </p:grpSpPr>
       <p:sp>
         <p:nvSpPr>
-          <p:cNvPr id="114" name="Google Shape;114;g3e6813604e6_1_37:notes"/>
+          <p:cNvPr id="114" name="Google Shape;114;g3dae72e459a_0_18:notes"/>
           <p:cNvSpPr/>
           <p:nvPr>
             <p:ph idx="2" type="sldImg"/>
@@ -2898,7 +3186,7 @@
       </p:sp>
       <p:sp>
         <p:nvSpPr>
-          <p:cNvPr id="115" name="Google Shape;115;g3e6813604e6_1_37:notes"/>
+          <p:cNvPr id="115" name="Google Shape;115;g3dae72e459a_0_18:notes"/>
           <p:cNvSpPr txBox="1"/>
           <p:nvPr>
             <p:ph idx="1" type="body"/>
@@ -2937,7 +3225,7 @@
       </p:sp>
       <p:sp>
         <p:nvSpPr>
-          <p:cNvPr id="116" name="Google Shape;116;g3e6813604e6_1_37:notes"/>
+          <p:cNvPr id="116" name="Google Shape;116;g3dae72e459a_0_18:notes"/>
           <p:cNvSpPr txBox="1"/>
           <p:nvPr>
             <p:ph idx="12" type="sldNum"/>
@@ -3006,7 +3294,7 @@
       </p:grpSpPr>
       <p:sp>
         <p:nvSpPr>
-          <p:cNvPr id="121" name="Google Shape;121;g3e6813604e6_1_45:notes"/>
+          <p:cNvPr id="121" name="Google Shape;121;g3e6813604e6_1_37:notes"/>
           <p:cNvSpPr/>
           <p:nvPr>
             <p:ph idx="2" type="sldImg"/>
@@ -3041,7 +3329,7 @@
       </p:sp>
       <p:sp>
         <p:nvSpPr>
-          <p:cNvPr id="122" name="Google Shape;122;g3e6813604e6_1_45:notes"/>
+          <p:cNvPr id="122" name="Google Shape;122;g3e6813604e6_1_37:notes"/>
           <p:cNvSpPr txBox="1"/>
           <p:nvPr>
             <p:ph idx="1" type="body"/>
@@ -3080,7 +3368,7 @@
       </p:sp>
       <p:sp>
         <p:nvSpPr>
-          <p:cNvPr id="123" name="Google Shape;123;g3e6813604e6_1_45:notes"/>
+          <p:cNvPr id="123" name="Google Shape;123;g3e6813604e6_1_37:notes"/>
           <p:cNvSpPr txBox="1"/>
           <p:nvPr>
             <p:ph idx="12" type="sldNum"/>
@@ -3149,7 +3437,7 @@
       </p:grpSpPr>
       <p:sp>
         <p:nvSpPr>
-          <p:cNvPr id="128" name="Google Shape;128;g3e6813604e6_1_53:notes"/>
+          <p:cNvPr id="128" name="Google Shape;128;g3e6813604e6_1_45:notes"/>
           <p:cNvSpPr/>
           <p:nvPr>
             <p:ph idx="2" type="sldImg"/>
@@ -3184,7 +3472,7 @@
       </p:sp>
       <p:sp>
         <p:nvSpPr>
-          <p:cNvPr id="129" name="Google Shape;129;g3e6813604e6_1_53:notes"/>
+          <p:cNvPr id="129" name="Google Shape;129;g3e6813604e6_1_45:notes"/>
           <p:cNvSpPr txBox="1"/>
           <p:nvPr>
             <p:ph idx="1" type="body"/>
@@ -3223,7 +3511,7 @@
       </p:sp>
       <p:sp>
         <p:nvSpPr>
-          <p:cNvPr id="130" name="Google Shape;130;g3e6813604e6_1_53:notes"/>
+          <p:cNvPr id="130" name="Google Shape;130;g3e6813604e6_1_45:notes"/>
           <p:cNvSpPr txBox="1"/>
           <p:nvPr>
             <p:ph idx="12" type="sldNum"/>
@@ -3278,7 +3566,7 @@
   <p:cSld>
     <p:spTree>
       <p:nvGrpSpPr>
-        <p:cNvPr id="137" name="Shape 137"/>
+        <p:cNvPr id="134" name="Shape 134"/>
         <p:cNvGrpSpPr/>
         <p:nvPr/>
       </p:nvGrpSpPr>
@@ -3292,7 +3580,7 @@
       </p:grpSpPr>
       <p:sp>
         <p:nvSpPr>
-          <p:cNvPr id="138" name="Google Shape;138;g3e6813604e6_1_61:notes"/>
+          <p:cNvPr id="135" name="Google Shape;135;g3e6813604e6_1_53:notes"/>
           <p:cNvSpPr/>
           <p:nvPr>
             <p:ph idx="2" type="sldImg"/>
@@ -3327,7 +3615,7 @@
       </p:sp>
       <p:sp>
         <p:nvSpPr>
-          <p:cNvPr id="139" name="Google Shape;139;g3e6813604e6_1_61:notes"/>
+          <p:cNvPr id="136" name="Google Shape;136;g3e6813604e6_1_53:notes"/>
           <p:cNvSpPr txBox="1"/>
           <p:nvPr>
             <p:ph idx="1" type="body"/>
@@ -3366,7 +3654,7 @@
       </p:sp>
       <p:sp>
         <p:nvSpPr>
-          <p:cNvPr id="140" name="Google Shape;140;g3e6813604e6_1_61:notes"/>
+          <p:cNvPr id="137" name="Google Shape;137;g3e6813604e6_1_53:notes"/>
           <p:cNvSpPr txBox="1"/>
           <p:nvPr>
             <p:ph idx="12" type="sldNum"/>
@@ -12590,7 +12878,7 @@
   <p:cSld>
     <p:spTree>
       <p:nvGrpSpPr>
-        <p:cNvPr id="149" name="Shape 149"/>
+        <p:cNvPr id="148" name="Shape 148"/>
         <p:cNvGrpSpPr/>
         <p:nvPr/>
       </p:nvGrpSpPr>
@@ -12604,7 +12892,7 @@
       </p:grpSpPr>
       <p:sp>
         <p:nvSpPr>
-          <p:cNvPr id="150" name="Google Shape;150;g3e6813604e6_1_70"/>
+          <p:cNvPr id="149" name="Google Shape;149;g3e6813604e6_1_61"/>
           <p:cNvSpPr txBox="1"/>
           <p:nvPr>
             <p:ph type="title"/>
@@ -12612,8 +12900,8 @@
         </p:nvSpPr>
         <p:spPr>
           <a:xfrm>
-            <a:off x="457200" y="0"/>
-            <a:ext cx="5028900" cy="914100"/>
+            <a:off x="457200" y="439625"/>
+            <a:ext cx="5028900" cy="474300"/>
           </a:xfrm>
           <a:prstGeom prst="rect">
             <a:avLst/>
@@ -12626,12 +12914,20 @@
           <a:lstStyle/>
           <a:p>
             <a:pPr indent="0" lvl="0" marL="0" rtl="0" algn="l">
-              <a:spcBef>
-                <a:spcPts val="0"/>
-              </a:spcBef>
-              <a:spcAft>
-                <a:spcPts val="0"/>
-              </a:spcAft>
+              <a:lnSpc>
+                <a:spcPct val="115000"/>
+              </a:lnSpc>
+              <a:spcBef>
+                <a:spcPts val="2400"/>
+              </a:spcBef>
+              <a:spcAft>
+                <a:spcPts val="0"/>
+              </a:spcAft>
+              <a:buClr>
+                <a:schemeClr val="dk1"/>
+              </a:buClr>
+              <a:buSzPts val="1100"/>
+              <a:buFont typeface="Arial"/>
               <a:buNone/>
             </a:pPr>
             <a:r>
@@ -12641,7 +12937,27 @@
                 <a:cs typeface="Times New Roman"/>
                 <a:sym typeface="Times New Roman"/>
               </a:rPr>
-              <a:t>Results &amp; Discussion </a:t>
+              <a:t>Correlation Analysis</a:t>
+            </a:r>
+            <a:endParaRPr sz="3200">
+              <a:latin typeface="Times New Roman"/>
+              <a:ea typeface="Times New Roman"/>
+              <a:cs typeface="Times New Roman"/>
+              <a:sym typeface="Times New Roman"/>
+            </a:endParaRPr>
+          </a:p>
+          <a:p>
+            <a:pPr indent="0" lvl="0" marL="0" rtl="0" algn="l">
+              <a:spcBef>
+                <a:spcPts val="600"/>
+              </a:spcBef>
+              <a:spcAft>
+                <a:spcPts val="0"/>
+              </a:spcAft>
+              <a:buNone/>
+            </a:pPr>
+            <a:r>
+              <a:t/>
             </a:r>
             <a:endParaRPr sz="3200">
               <a:latin typeface="Times New Roman"/>
@@ -12654,7 +12970,7 @@
       </p:sp>
       <p:sp>
         <p:nvSpPr>
-          <p:cNvPr id="151" name="Google Shape;151;g3e6813604e6_1_70"/>
+          <p:cNvPr id="150" name="Google Shape;150;g3e6813604e6_1_61"/>
           <p:cNvSpPr txBox="1"/>
           <p:nvPr>
             <p:ph idx="1" type="body"/>
@@ -12662,8 +12978,8 @@
         </p:nvSpPr>
         <p:spPr>
           <a:xfrm>
-            <a:off x="457200" y="1172301"/>
-            <a:ext cx="8229300" cy="4409700"/>
+            <a:off x="457200" y="1154001"/>
+            <a:ext cx="8229300" cy="4428000"/>
           </a:xfrm>
           <a:prstGeom prst="rect">
             <a:avLst/>
@@ -12699,7 +13015,7 @@
                 <a:cs typeface="Times New Roman"/>
                 <a:sym typeface="Times New Roman"/>
               </a:rPr>
-              <a:t>The analysis highlights the significant impact of screen time on students’ productivity and mental health.</a:t>
+              <a:t>Correlation analysis was performed to understand the relationship between screen time and other variables such as productivity, stress levels, and sleep quality. It helps in identifying how strongly these variables are connected and whether the relationship is positive or negative.</a:t>
             </a:r>
             <a:endParaRPr sz="2000">
               <a:latin typeface="Times New Roman"/>
@@ -12724,46 +13040,15 @@
               <a:buChar char="●"/>
             </a:pPr>
             <a:r>
-              <a:rPr lang="en-US" sz="2000">
+              <a:rPr b="1" lang="en-US" sz="2000">
                 <a:latin typeface="Times New Roman"/>
                 <a:ea typeface="Times New Roman"/>
                 <a:cs typeface="Times New Roman"/>
                 <a:sym typeface="Times New Roman"/>
               </a:rPr>
-              <a:t>Moderate screen usage can support learning and productivity</a:t>
+              <a:t>Negative correlation between:</a:t>
             </a:r>
-            <a:endParaRPr sz="2000">
-              <a:latin typeface="Times New Roman"/>
-              <a:ea typeface="Times New Roman"/>
-              <a:cs typeface="Times New Roman"/>
-              <a:sym typeface="Times New Roman"/>
-            </a:endParaRPr>
-          </a:p>
-          <a:p>
-            <a:pPr indent="-355600" lvl="0" marL="457200" rtl="0" algn="l">
-              <a:lnSpc>
-                <a:spcPct val="115000"/>
-              </a:lnSpc>
-              <a:spcBef>
-                <a:spcPts val="0"/>
-              </a:spcBef>
-              <a:spcAft>
-                <a:spcPts val="0"/>
-              </a:spcAft>
-              <a:buSzPts val="2000"/>
-              <a:buFont typeface="Times New Roman"/>
-              <a:buChar char="●"/>
-            </a:pPr>
-            <a:r>
-              <a:rPr lang="en-US" sz="2000">
-                <a:latin typeface="Times New Roman"/>
-                <a:ea typeface="Times New Roman"/>
-                <a:cs typeface="Times New Roman"/>
-                <a:sym typeface="Times New Roman"/>
-              </a:rPr>
-              <a:t>Excessive screen time leads to:</a:t>
-            </a:r>
-            <a:endParaRPr sz="2000">
+            <a:endParaRPr b="1" sz="2000">
               <a:latin typeface="Times New Roman"/>
               <a:ea typeface="Times New Roman"/>
               <a:cs typeface="Times New Roman"/>
@@ -12792,7 +13077,7 @@
                 <a:cs typeface="Times New Roman"/>
                 <a:sym typeface="Times New Roman"/>
               </a:rPr>
-              <a:t>Decreased productivity</a:t>
+              <a:t>Screen Time and Productivity</a:t>
             </a:r>
             <a:endParaRPr sz="2000">
               <a:latin typeface="Times New Roman"/>
@@ -12823,9 +13108,40 @@
                 <a:cs typeface="Times New Roman"/>
                 <a:sym typeface="Times New Roman"/>
               </a:rPr>
-              <a:t>Increased stress levels</a:t>
+              <a:t>Screen Time and Sleep Quality</a:t>
             </a:r>
             <a:endParaRPr sz="2000">
+              <a:latin typeface="Times New Roman"/>
+              <a:ea typeface="Times New Roman"/>
+              <a:cs typeface="Times New Roman"/>
+              <a:sym typeface="Times New Roman"/>
+            </a:endParaRPr>
+          </a:p>
+          <a:p>
+            <a:pPr indent="-355600" lvl="0" marL="457200" rtl="0" algn="l">
+              <a:lnSpc>
+                <a:spcPct val="115000"/>
+              </a:lnSpc>
+              <a:spcBef>
+                <a:spcPts val="0"/>
+              </a:spcBef>
+              <a:spcAft>
+                <a:spcPts val="0"/>
+              </a:spcAft>
+              <a:buSzPts val="2000"/>
+              <a:buFont typeface="Times New Roman"/>
+              <a:buChar char="●"/>
+            </a:pPr>
+            <a:r>
+              <a:rPr b="1" lang="en-US" sz="2000">
+                <a:latin typeface="Times New Roman"/>
+                <a:ea typeface="Times New Roman"/>
+                <a:cs typeface="Times New Roman"/>
+                <a:sym typeface="Times New Roman"/>
+              </a:rPr>
+              <a:t>Positive correlation between:</a:t>
+            </a:r>
+            <a:endParaRPr b="1" sz="2000">
               <a:latin typeface="Times New Roman"/>
               <a:ea typeface="Times New Roman"/>
               <a:cs typeface="Times New Roman"/>
@@ -12854,131 +13170,7 @@
                 <a:cs typeface="Times New Roman"/>
                 <a:sym typeface="Times New Roman"/>
               </a:rPr>
-              <a:t>Poor sleep quality</a:t>
-            </a:r>
-            <a:endParaRPr sz="2000">
-              <a:latin typeface="Times New Roman"/>
-              <a:ea typeface="Times New Roman"/>
-              <a:cs typeface="Times New Roman"/>
-              <a:sym typeface="Times New Roman"/>
-            </a:endParaRPr>
-          </a:p>
-          <a:p>
-            <a:pPr indent="-355600" lvl="0" marL="457200" rtl="0" algn="l">
-              <a:lnSpc>
-                <a:spcPct val="115000"/>
-              </a:lnSpc>
-              <a:spcBef>
-                <a:spcPts val="0"/>
-              </a:spcBef>
-              <a:spcAft>
-                <a:spcPts val="0"/>
-              </a:spcAft>
-              <a:buSzPts val="2000"/>
-              <a:buFont typeface="Times New Roman"/>
-              <a:buChar char="●"/>
-            </a:pPr>
-            <a:r>
-              <a:rPr lang="en-US" sz="2000">
-                <a:latin typeface="Times New Roman"/>
-                <a:ea typeface="Times New Roman"/>
-                <a:cs typeface="Times New Roman"/>
-                <a:sym typeface="Times New Roman"/>
-              </a:rPr>
-              <a:t>Key factors affecting performance:</a:t>
-            </a:r>
-            <a:endParaRPr sz="2000">
-              <a:latin typeface="Times New Roman"/>
-              <a:ea typeface="Times New Roman"/>
-              <a:cs typeface="Times New Roman"/>
-              <a:sym typeface="Times New Roman"/>
-            </a:endParaRPr>
-          </a:p>
-          <a:p>
-            <a:pPr indent="-355600" lvl="1" marL="914400" rtl="0" algn="l">
-              <a:lnSpc>
-                <a:spcPct val="115000"/>
-              </a:lnSpc>
-              <a:spcBef>
-                <a:spcPts val="0"/>
-              </a:spcBef>
-              <a:spcAft>
-                <a:spcPts val="0"/>
-              </a:spcAft>
-              <a:buSzPts val="2000"/>
-              <a:buFont typeface="Times New Roman"/>
-              <a:buChar char="○"/>
-            </a:pPr>
-            <a:r>
-              <a:rPr lang="en-US" sz="2000">
-                <a:latin typeface="Times New Roman"/>
-                <a:ea typeface="Times New Roman"/>
-                <a:cs typeface="Times New Roman"/>
-                <a:sym typeface="Times New Roman"/>
-              </a:rPr>
-              <a:t>Distraction</a:t>
-            </a:r>
-            <a:endParaRPr sz="2000">
-              <a:latin typeface="Times New Roman"/>
-              <a:ea typeface="Times New Roman"/>
-              <a:cs typeface="Times New Roman"/>
-              <a:sym typeface="Times New Roman"/>
-            </a:endParaRPr>
-          </a:p>
-          <a:p>
-            <a:pPr indent="-355600" lvl="1" marL="914400" rtl="0" algn="l">
-              <a:lnSpc>
-                <a:spcPct val="115000"/>
-              </a:lnSpc>
-              <a:spcBef>
-                <a:spcPts val="0"/>
-              </a:spcBef>
-              <a:spcAft>
-                <a:spcPts val="0"/>
-              </a:spcAft>
-              <a:buSzPts val="2000"/>
-              <a:buFont typeface="Times New Roman"/>
-              <a:buChar char="○"/>
-            </a:pPr>
-            <a:r>
-              <a:rPr lang="en-US" sz="2000">
-                <a:latin typeface="Times New Roman"/>
-                <a:ea typeface="Times New Roman"/>
-                <a:cs typeface="Times New Roman"/>
-                <a:sym typeface="Times New Roman"/>
-              </a:rPr>
-              <a:t>Cognitive fatigue</a:t>
-            </a:r>
-            <a:endParaRPr sz="2000">
-              <a:latin typeface="Times New Roman"/>
-              <a:ea typeface="Times New Roman"/>
-              <a:cs typeface="Times New Roman"/>
-              <a:sym typeface="Times New Roman"/>
-            </a:endParaRPr>
-          </a:p>
-          <a:p>
-            <a:pPr indent="-355600" lvl="1" marL="914400" rtl="0" algn="l">
-              <a:lnSpc>
-                <a:spcPct val="115000"/>
-              </a:lnSpc>
-              <a:spcBef>
-                <a:spcPts val="0"/>
-              </a:spcBef>
-              <a:spcAft>
-                <a:spcPts val="0"/>
-              </a:spcAft>
-              <a:buSzPts val="2000"/>
-              <a:buFont typeface="Times New Roman"/>
-              <a:buChar char="○"/>
-            </a:pPr>
-            <a:r>
-              <a:rPr lang="en-US" sz="2000">
-                <a:latin typeface="Times New Roman"/>
-                <a:ea typeface="Times New Roman"/>
-                <a:cs typeface="Times New Roman"/>
-                <a:sym typeface="Times New Roman"/>
-              </a:rPr>
-              <a:t>Reduced concentration</a:t>
+              <a:t>Screen Time and Stress Levels</a:t>
             </a:r>
             <a:endParaRPr sz="2000">
               <a:latin typeface="Times New Roman"/>
@@ -13006,13 +13198,30 @@
               <a:buNone/>
             </a:pPr>
             <a:r>
+              <a:rPr b="1" lang="en-US" sz="2000">
+                <a:latin typeface="Times New Roman"/>
+                <a:ea typeface="Times New Roman"/>
+                <a:cs typeface="Times New Roman"/>
+                <a:sym typeface="Times New Roman"/>
+              </a:rPr>
+              <a:t>Key Insight:</a:t>
+            </a:r>
+            <a:br>
+              <a:rPr b="1" lang="en-US" sz="2000">
+                <a:latin typeface="Times New Roman"/>
+                <a:ea typeface="Times New Roman"/>
+                <a:cs typeface="Times New Roman"/>
+                <a:sym typeface="Times New Roman"/>
+              </a:rPr>
+            </a:br>
+            <a:r>
               <a:rPr lang="en-US" sz="2000">
                 <a:latin typeface="Times New Roman"/>
                 <a:ea typeface="Times New Roman"/>
                 <a:cs typeface="Times New Roman"/>
                 <a:sym typeface="Times New Roman"/>
               </a:rPr>
-              <a:t>The machine learning model confirms a negative relationship between screen time and productivity.</a:t>
+              <a:t> Higher screen time leads to lower productivity and reduced sleep quality, while increasing stress levels. This indicates that excessive screen usage has a negative impact on both academic performance and mental well-being.</a:t>
             </a:r>
             <a:endParaRPr sz="2000">
               <a:latin typeface="Times New Roman"/>
@@ -13056,7 +13265,60 @@
   <p:cSld>
     <p:spTree>
       <p:nvGrpSpPr>
-        <p:cNvPr id="156" name="Shape 156"/>
+        <p:cNvPr id="155" name="Shape 155"/>
+        <p:cNvGrpSpPr/>
+        <p:nvPr/>
+      </p:nvGrpSpPr>
+      <p:grpSpPr>
+        <a:xfrm>
+          <a:off x="0" y="0"/>
+          <a:ext cx="0" cy="0"/>
+          <a:chOff x="0" y="0"/>
+          <a:chExt cx="0" cy="0"/>
+        </a:xfrm>
+      </p:grpSpPr>
+      <p:pic>
+        <p:nvPicPr>
+          <p:cNvPr id="156" name="Google Shape;156;g3dae72e459a_0_9" title="correlationmatrix.png"/>
+          <p:cNvPicPr preferRelativeResize="0"/>
+          <p:nvPr/>
+        </p:nvPicPr>
+        <p:blipFill>
+          <a:blip r:embed="rId3">
+            <a:alphaModFix/>
+          </a:blip>
+          <a:stretch>
+            <a:fillRect/>
+          </a:stretch>
+        </p:blipFill>
+        <p:spPr>
+          <a:xfrm>
+            <a:off x="1814813" y="1519775"/>
+            <a:ext cx="5514375" cy="4329800"/>
+          </a:xfrm>
+          <a:prstGeom prst="rect">
+            <a:avLst/>
+          </a:prstGeom>
+          <a:noFill/>
+          <a:ln>
+            <a:noFill/>
+          </a:ln>
+        </p:spPr>
+      </p:pic>
+    </p:spTree>
+  </p:cSld>
+  <p:clrMapOvr>
+    <a:masterClrMapping/>
+  </p:clrMapOvr>
+</p:sld>
+</file>
+
+<file path=ppt/slides/slide12.xml><?xml version="1.0" encoding="utf-8"?>
+<p:sld xmlns:a="http://schemas.openxmlformats.org/drawingml/2006/main" xmlns:r="http://schemas.openxmlformats.org/officeDocument/2006/relationships" xmlns:mc="http://schemas.openxmlformats.org/markup-compatibility/2006" xmlns:mv="urn:schemas-microsoft-com:mac:vml" xmlns:p="http://schemas.openxmlformats.org/presentationml/2006/main" xmlns:c="http://schemas.openxmlformats.org/drawingml/2006/chart" xmlns:dgm="http://schemas.openxmlformats.org/drawingml/2006/diagram" xmlns:o="urn:schemas-microsoft-com:office:office" xmlns:v="urn:schemas-microsoft-com:vml" xmlns:pvml="urn:schemas-microsoft-com:office:powerpoint" xmlns:com="http://schemas.openxmlformats.org/drawingml/2006/compatibility" xmlns:p14="http://schemas.microsoft.com/office/powerpoint/2010/main" xmlns:p15="http://schemas.microsoft.com/office/powerpoint/2012/main" xmlns:ahyp="http://schemas.microsoft.com/office/drawing/2018/hyperlinkcolor">
+  <p:cSld>
+    <p:spTree>
+      <p:nvGrpSpPr>
+        <p:cNvPr id="161" name="Shape 161"/>
         <p:cNvGrpSpPr/>
         <p:nvPr/>
       </p:nvGrpSpPr>
@@ -13070,7 +13332,7 @@
       </p:grpSpPr>
       <p:sp>
         <p:nvSpPr>
-          <p:cNvPr id="157" name="Google Shape;157;g3e6813604e6_1_78"/>
+          <p:cNvPr id="162" name="Google Shape;162;g3e6813604e6_1_70"/>
           <p:cNvSpPr txBox="1"/>
           <p:nvPr>
             <p:ph type="title"/>
@@ -13107,7 +13369,7 @@
                 <a:cs typeface="Times New Roman"/>
                 <a:sym typeface="Times New Roman"/>
               </a:rPr>
-              <a:t>Conclusion</a:t>
+              <a:t>Results &amp; Discussion </a:t>
             </a:r>
             <a:endParaRPr sz="3200">
               <a:latin typeface="Times New Roman"/>
@@ -13120,7 +13382,7 @@
       </p:sp>
       <p:sp>
         <p:nvSpPr>
-          <p:cNvPr id="158" name="Google Shape;158;g3e6813604e6_1_78"/>
+          <p:cNvPr id="163" name="Google Shape;163;g3e6813604e6_1_70"/>
           <p:cNvSpPr txBox="1"/>
           <p:nvPr>
             <p:ph idx="1" type="body"/>
@@ -13128,8 +13390,8 @@
         </p:nvSpPr>
         <p:spPr>
           <a:xfrm>
-            <a:off x="457200" y="1135676"/>
-            <a:ext cx="8229300" cy="4446300"/>
+            <a:off x="457200" y="1172301"/>
+            <a:ext cx="8229300" cy="4409700"/>
           </a:xfrm>
           <a:prstGeom prst="rect">
             <a:avLst/>
@@ -13165,7 +13427,7 @@
                 <a:cs typeface="Times New Roman"/>
                 <a:sym typeface="Times New Roman"/>
               </a:rPr>
-              <a:t>This study highlights that screen time plays a significant role in influencing students’ productivity and mental well-being.</a:t>
+              <a:t>The analysis highlights the significant impact of screen time on students’ productivity and mental health.</a:t>
             </a:r>
             <a:endParaRPr sz="2000">
               <a:latin typeface="Times New Roman"/>
@@ -13196,7 +13458,38 @@
                 <a:cs typeface="Times New Roman"/>
                 <a:sym typeface="Times New Roman"/>
               </a:rPr>
-              <a:t>Excessive screen usage leads to:</a:t>
+              <a:t>Moderate screen usage can support learning and productivity</a:t>
+            </a:r>
+            <a:endParaRPr sz="2000">
+              <a:latin typeface="Times New Roman"/>
+              <a:ea typeface="Times New Roman"/>
+              <a:cs typeface="Times New Roman"/>
+              <a:sym typeface="Times New Roman"/>
+            </a:endParaRPr>
+          </a:p>
+          <a:p>
+            <a:pPr indent="-355600" lvl="0" marL="457200" rtl="0" algn="l">
+              <a:lnSpc>
+                <a:spcPct val="115000"/>
+              </a:lnSpc>
+              <a:spcBef>
+                <a:spcPts val="0"/>
+              </a:spcBef>
+              <a:spcAft>
+                <a:spcPts val="0"/>
+              </a:spcAft>
+              <a:buSzPts val="2000"/>
+              <a:buFont typeface="Times New Roman"/>
+              <a:buChar char="●"/>
+            </a:pPr>
+            <a:r>
+              <a:rPr lang="en-US" sz="2000">
+                <a:latin typeface="Times New Roman"/>
+                <a:ea typeface="Times New Roman"/>
+                <a:cs typeface="Times New Roman"/>
+                <a:sym typeface="Times New Roman"/>
+              </a:rPr>
+              <a:t>Excessive screen time leads to:</a:t>
             </a:r>
             <a:endParaRPr sz="2000">
               <a:latin typeface="Times New Roman"/>
@@ -13227,7 +13520,7 @@
                 <a:cs typeface="Times New Roman"/>
                 <a:sym typeface="Times New Roman"/>
               </a:rPr>
-              <a:t>Reduced productivity</a:t>
+              <a:t>Decreased productivity</a:t>
             </a:r>
             <a:endParaRPr sz="2000">
               <a:latin typeface="Times New Roman"/>
@@ -13320,7 +13613,100 @@
                 <a:cs typeface="Times New Roman"/>
                 <a:sym typeface="Times New Roman"/>
               </a:rPr>
-              <a:t>Controlled and mindful usage of digital devices can improve overall performance and well-being</a:t>
+              <a:t>Key factors affecting performance:</a:t>
+            </a:r>
+            <a:endParaRPr sz="2000">
+              <a:latin typeface="Times New Roman"/>
+              <a:ea typeface="Times New Roman"/>
+              <a:cs typeface="Times New Roman"/>
+              <a:sym typeface="Times New Roman"/>
+            </a:endParaRPr>
+          </a:p>
+          <a:p>
+            <a:pPr indent="-355600" lvl="1" marL="914400" rtl="0" algn="l">
+              <a:lnSpc>
+                <a:spcPct val="115000"/>
+              </a:lnSpc>
+              <a:spcBef>
+                <a:spcPts val="0"/>
+              </a:spcBef>
+              <a:spcAft>
+                <a:spcPts val="0"/>
+              </a:spcAft>
+              <a:buSzPts val="2000"/>
+              <a:buFont typeface="Times New Roman"/>
+              <a:buChar char="○"/>
+            </a:pPr>
+            <a:r>
+              <a:rPr lang="en-US" sz="2000">
+                <a:latin typeface="Times New Roman"/>
+                <a:ea typeface="Times New Roman"/>
+                <a:cs typeface="Times New Roman"/>
+                <a:sym typeface="Times New Roman"/>
+              </a:rPr>
+              <a:t>Distraction</a:t>
+            </a:r>
+            <a:endParaRPr sz="2000">
+              <a:latin typeface="Times New Roman"/>
+              <a:ea typeface="Times New Roman"/>
+              <a:cs typeface="Times New Roman"/>
+              <a:sym typeface="Times New Roman"/>
+            </a:endParaRPr>
+          </a:p>
+          <a:p>
+            <a:pPr indent="-355600" lvl="1" marL="914400" rtl="0" algn="l">
+              <a:lnSpc>
+                <a:spcPct val="115000"/>
+              </a:lnSpc>
+              <a:spcBef>
+                <a:spcPts val="0"/>
+              </a:spcBef>
+              <a:spcAft>
+                <a:spcPts val="0"/>
+              </a:spcAft>
+              <a:buSzPts val="2000"/>
+              <a:buFont typeface="Times New Roman"/>
+              <a:buChar char="○"/>
+            </a:pPr>
+            <a:r>
+              <a:rPr lang="en-US" sz="2000">
+                <a:latin typeface="Times New Roman"/>
+                <a:ea typeface="Times New Roman"/>
+                <a:cs typeface="Times New Roman"/>
+                <a:sym typeface="Times New Roman"/>
+              </a:rPr>
+              <a:t>Cognitive fatigue</a:t>
+            </a:r>
+            <a:endParaRPr sz="2000">
+              <a:latin typeface="Times New Roman"/>
+              <a:ea typeface="Times New Roman"/>
+              <a:cs typeface="Times New Roman"/>
+              <a:sym typeface="Times New Roman"/>
+            </a:endParaRPr>
+          </a:p>
+          <a:p>
+            <a:pPr indent="-355600" lvl="1" marL="914400" rtl="0" algn="l">
+              <a:lnSpc>
+                <a:spcPct val="115000"/>
+              </a:lnSpc>
+              <a:spcBef>
+                <a:spcPts val="0"/>
+              </a:spcBef>
+              <a:spcAft>
+                <a:spcPts val="0"/>
+              </a:spcAft>
+              <a:buSzPts val="2000"/>
+              <a:buFont typeface="Times New Roman"/>
+              <a:buChar char="○"/>
+            </a:pPr>
+            <a:r>
+              <a:rPr lang="en-US" sz="2000">
+                <a:latin typeface="Times New Roman"/>
+                <a:ea typeface="Times New Roman"/>
+                <a:cs typeface="Times New Roman"/>
+                <a:sym typeface="Times New Roman"/>
+              </a:rPr>
+              <a:t>Reduced concentration</a:t>
             </a:r>
             <a:endParaRPr sz="2000">
               <a:latin typeface="Times New Roman"/>
@@ -13354,349 +13740,7 @@
                 <a:cs typeface="Times New Roman"/>
                 <a:sym typeface="Times New Roman"/>
               </a:rPr>
-              <a:t>A data-driven and machine learning approach helps in better understanding and predicting these effects.</a:t>
-            </a:r>
-            <a:endParaRPr sz="2000">
-              <a:latin typeface="Times New Roman"/>
-              <a:ea typeface="Times New Roman"/>
-              <a:cs typeface="Times New Roman"/>
-              <a:sym typeface="Times New Roman"/>
-            </a:endParaRPr>
-          </a:p>
-          <a:p>
-            <a:pPr indent="0" lvl="0" marL="0" rtl="0" algn="l">
-              <a:spcBef>
-                <a:spcPts val="1200"/>
-              </a:spcBef>
-              <a:spcAft>
-                <a:spcPts val="0"/>
-              </a:spcAft>
-              <a:buNone/>
-            </a:pPr>
-            <a:r>
-              <a:t/>
-            </a:r>
-            <a:endParaRPr sz="2000">
-              <a:latin typeface="Times New Roman"/>
-              <a:ea typeface="Times New Roman"/>
-              <a:cs typeface="Times New Roman"/>
-              <a:sym typeface="Times New Roman"/>
-            </a:endParaRPr>
-          </a:p>
-        </p:txBody>
-      </p:sp>
-    </p:spTree>
-  </p:cSld>
-  <p:clrMapOvr>
-    <a:masterClrMapping/>
-  </p:clrMapOvr>
-</p:sld>
-</file>
-
-<file path=ppt/slides/slide12.xml><?xml version="1.0" encoding="utf-8"?>
-<p:sld xmlns:a="http://schemas.openxmlformats.org/drawingml/2006/main" xmlns:r="http://schemas.openxmlformats.org/officeDocument/2006/relationships" xmlns:mc="http://schemas.openxmlformats.org/markup-compatibility/2006" xmlns:mv="urn:schemas-microsoft-com:mac:vml" xmlns:p="http://schemas.openxmlformats.org/presentationml/2006/main" xmlns:c="http://schemas.openxmlformats.org/drawingml/2006/chart" xmlns:dgm="http://schemas.openxmlformats.org/drawingml/2006/diagram" xmlns:o="urn:schemas-microsoft-com:office:office" xmlns:v="urn:schemas-microsoft-com:vml" xmlns:pvml="urn:schemas-microsoft-com:office:powerpoint" xmlns:com="http://schemas.openxmlformats.org/drawingml/2006/compatibility" xmlns:p14="http://schemas.microsoft.com/office/powerpoint/2010/main" xmlns:p15="http://schemas.microsoft.com/office/powerpoint/2012/main" xmlns:ahyp="http://schemas.microsoft.com/office/drawing/2018/hyperlinkcolor">
-  <p:cSld>
-    <p:spTree>
-      <p:nvGrpSpPr>
-        <p:cNvPr id="163" name="Shape 163"/>
-        <p:cNvGrpSpPr/>
-        <p:nvPr/>
-      </p:nvGrpSpPr>
-      <p:grpSpPr>
-        <a:xfrm>
-          <a:off x="0" y="0"/>
-          <a:ext cx="0" cy="0"/>
-          <a:chOff x="0" y="0"/>
-          <a:chExt cx="0" cy="0"/>
-        </a:xfrm>
-      </p:grpSpPr>
-      <p:sp>
-        <p:nvSpPr>
-          <p:cNvPr id="164" name="Google Shape;164;g3e6813604e6_1_85"/>
-          <p:cNvSpPr txBox="1"/>
-          <p:nvPr>
-            <p:ph type="title"/>
-          </p:nvPr>
-        </p:nvSpPr>
-        <p:spPr>
-          <a:xfrm>
-            <a:off x="457200" y="0"/>
-            <a:ext cx="5028900" cy="914100"/>
-          </a:xfrm>
-          <a:prstGeom prst="rect">
-            <a:avLst/>
-          </a:prstGeom>
-        </p:spPr>
-        <p:txBody>
-          <a:bodyPr anchorCtr="0" anchor="ctr" bIns="0" lIns="0" spcFirstLastPara="1" rIns="0" wrap="square" tIns="0">
-            <a:noAutofit/>
-          </a:bodyPr>
-          <a:lstStyle/>
-          <a:p>
-            <a:pPr indent="0" lvl="0" marL="0" rtl="0" algn="l">
-              <a:spcBef>
-                <a:spcPts val="0"/>
-              </a:spcBef>
-              <a:spcAft>
-                <a:spcPts val="0"/>
-              </a:spcAft>
-              <a:buNone/>
-            </a:pPr>
-            <a:r>
-              <a:rPr lang="en-US" sz="3200">
-                <a:latin typeface="Times New Roman"/>
-                <a:ea typeface="Times New Roman"/>
-                <a:cs typeface="Times New Roman"/>
-                <a:sym typeface="Times New Roman"/>
-              </a:rPr>
-              <a:t>Recommendations </a:t>
-            </a:r>
-            <a:endParaRPr sz="3200">
-              <a:latin typeface="Times New Roman"/>
-              <a:ea typeface="Times New Roman"/>
-              <a:cs typeface="Times New Roman"/>
-              <a:sym typeface="Times New Roman"/>
-            </a:endParaRPr>
-          </a:p>
-        </p:txBody>
-      </p:sp>
-      <p:sp>
-        <p:nvSpPr>
-          <p:cNvPr id="165" name="Google Shape;165;g3e6813604e6_1_85"/>
-          <p:cNvSpPr txBox="1"/>
-          <p:nvPr>
-            <p:ph idx="1" type="body"/>
-          </p:nvPr>
-        </p:nvSpPr>
-        <p:spPr>
-          <a:xfrm>
-            <a:off x="457200" y="1117351"/>
-            <a:ext cx="8229300" cy="4464600"/>
-          </a:xfrm>
-          <a:prstGeom prst="rect">
-            <a:avLst/>
-          </a:prstGeom>
-        </p:spPr>
-        <p:txBody>
-          <a:bodyPr anchorCtr="0" anchor="t" bIns="0" lIns="0" spcFirstLastPara="1" rIns="0" wrap="square" tIns="0">
-            <a:normAutofit/>
-          </a:bodyPr>
-          <a:lstStyle/>
-          <a:p>
-            <a:pPr indent="0" lvl="0" marL="0" rtl="0" algn="l">
-              <a:lnSpc>
-                <a:spcPct val="115000"/>
-              </a:lnSpc>
-              <a:spcBef>
-                <a:spcPts val="1200"/>
-              </a:spcBef>
-              <a:spcAft>
-                <a:spcPts val="0"/>
-              </a:spcAft>
-              <a:buClr>
-                <a:schemeClr val="dk1"/>
-              </a:buClr>
-              <a:buSzPts val="1100"/>
-              <a:buFont typeface="Arial"/>
-              <a:buNone/>
-            </a:pPr>
-            <a:r>
-              <a:rPr lang="en-US" sz="2000">
-                <a:latin typeface="Times New Roman"/>
-                <a:ea typeface="Times New Roman"/>
-                <a:cs typeface="Times New Roman"/>
-                <a:sym typeface="Times New Roman"/>
-              </a:rPr>
-              <a:t>To improve productivity and mental well-being, the following measures are suggested:</a:t>
-            </a:r>
-            <a:endParaRPr sz="2000">
-              <a:latin typeface="Times New Roman"/>
-              <a:ea typeface="Times New Roman"/>
-              <a:cs typeface="Times New Roman"/>
-              <a:sym typeface="Times New Roman"/>
-            </a:endParaRPr>
-          </a:p>
-          <a:p>
-            <a:pPr indent="-355600" lvl="0" marL="457200" rtl="0" algn="l">
-              <a:lnSpc>
-                <a:spcPct val="115000"/>
-              </a:lnSpc>
-              <a:spcBef>
-                <a:spcPts val="1200"/>
-              </a:spcBef>
-              <a:spcAft>
-                <a:spcPts val="0"/>
-              </a:spcAft>
-              <a:buSzPts val="2000"/>
-              <a:buFont typeface="Times New Roman"/>
-              <a:buChar char="●"/>
-            </a:pPr>
-            <a:r>
-              <a:rPr lang="en-US" sz="2000">
-                <a:latin typeface="Times New Roman"/>
-                <a:ea typeface="Times New Roman"/>
-                <a:cs typeface="Times New Roman"/>
-                <a:sym typeface="Times New Roman"/>
-              </a:rPr>
-              <a:t>Limit non-academic screen time</a:t>
-            </a:r>
-            <a:endParaRPr sz="2000">
-              <a:latin typeface="Times New Roman"/>
-              <a:ea typeface="Times New Roman"/>
-              <a:cs typeface="Times New Roman"/>
-              <a:sym typeface="Times New Roman"/>
-            </a:endParaRPr>
-          </a:p>
-          <a:p>
-            <a:pPr indent="-355600" lvl="0" marL="457200" rtl="0" algn="l">
-              <a:lnSpc>
-                <a:spcPct val="115000"/>
-              </a:lnSpc>
-              <a:spcBef>
-                <a:spcPts val="0"/>
-              </a:spcBef>
-              <a:spcAft>
-                <a:spcPts val="0"/>
-              </a:spcAft>
-              <a:buSzPts val="2000"/>
-              <a:buFont typeface="Times New Roman"/>
-              <a:buChar char="●"/>
-            </a:pPr>
-            <a:r>
-              <a:rPr lang="en-US" sz="2000">
-                <a:latin typeface="Times New Roman"/>
-                <a:ea typeface="Times New Roman"/>
-                <a:cs typeface="Times New Roman"/>
-                <a:sym typeface="Times New Roman"/>
-              </a:rPr>
-              <a:t>Take regular breaks during screen usage</a:t>
-            </a:r>
-            <a:endParaRPr sz="2000">
-              <a:latin typeface="Times New Roman"/>
-              <a:ea typeface="Times New Roman"/>
-              <a:cs typeface="Times New Roman"/>
-              <a:sym typeface="Times New Roman"/>
-            </a:endParaRPr>
-          </a:p>
-          <a:p>
-            <a:pPr indent="-355600" lvl="0" marL="457200" rtl="0" algn="l">
-              <a:lnSpc>
-                <a:spcPct val="115000"/>
-              </a:lnSpc>
-              <a:spcBef>
-                <a:spcPts val="0"/>
-              </a:spcBef>
-              <a:spcAft>
-                <a:spcPts val="0"/>
-              </a:spcAft>
-              <a:buSzPts val="2000"/>
-              <a:buFont typeface="Times New Roman"/>
-              <a:buChar char="●"/>
-            </a:pPr>
-            <a:r>
-              <a:rPr lang="en-US" sz="2000">
-                <a:latin typeface="Times New Roman"/>
-                <a:ea typeface="Times New Roman"/>
-                <a:cs typeface="Times New Roman"/>
-                <a:sym typeface="Times New Roman"/>
-              </a:rPr>
-              <a:t>Avoid screen exposure before sleep</a:t>
-            </a:r>
-            <a:endParaRPr sz="2000">
-              <a:latin typeface="Times New Roman"/>
-              <a:ea typeface="Times New Roman"/>
-              <a:cs typeface="Times New Roman"/>
-              <a:sym typeface="Times New Roman"/>
-            </a:endParaRPr>
-          </a:p>
-          <a:p>
-            <a:pPr indent="-355600" lvl="0" marL="457200" rtl="0" algn="l">
-              <a:lnSpc>
-                <a:spcPct val="115000"/>
-              </a:lnSpc>
-              <a:spcBef>
-                <a:spcPts val="0"/>
-              </a:spcBef>
-              <a:spcAft>
-                <a:spcPts val="0"/>
-              </a:spcAft>
-              <a:buSzPts val="2000"/>
-              <a:buFont typeface="Times New Roman"/>
-              <a:buChar char="●"/>
-            </a:pPr>
-            <a:r>
-              <a:rPr lang="en-US" sz="2000">
-                <a:latin typeface="Times New Roman"/>
-                <a:ea typeface="Times New Roman"/>
-                <a:cs typeface="Times New Roman"/>
-                <a:sym typeface="Times New Roman"/>
-              </a:rPr>
-              <a:t>Maintain a balanced daily routine</a:t>
-            </a:r>
-            <a:endParaRPr sz="2000">
-              <a:latin typeface="Times New Roman"/>
-              <a:ea typeface="Times New Roman"/>
-              <a:cs typeface="Times New Roman"/>
-              <a:sym typeface="Times New Roman"/>
-            </a:endParaRPr>
-          </a:p>
-          <a:p>
-            <a:pPr indent="-355600" lvl="0" marL="457200" rtl="0" algn="l">
-              <a:lnSpc>
-                <a:spcPct val="115000"/>
-              </a:lnSpc>
-              <a:spcBef>
-                <a:spcPts val="0"/>
-              </a:spcBef>
-              <a:spcAft>
-                <a:spcPts val="0"/>
-              </a:spcAft>
-              <a:buSzPts val="2000"/>
-              <a:buFont typeface="Times New Roman"/>
-              <a:buChar char="●"/>
-            </a:pPr>
-            <a:r>
-              <a:rPr lang="en-US" sz="2000">
-                <a:latin typeface="Times New Roman"/>
-                <a:ea typeface="Times New Roman"/>
-                <a:cs typeface="Times New Roman"/>
-                <a:sym typeface="Times New Roman"/>
-              </a:rPr>
-              <a:t>Practice digital detox to reduce dependency</a:t>
-            </a:r>
-            <a:endParaRPr sz="2000">
-              <a:latin typeface="Times New Roman"/>
-              <a:ea typeface="Times New Roman"/>
-              <a:cs typeface="Times New Roman"/>
-              <a:sym typeface="Times New Roman"/>
-            </a:endParaRPr>
-          </a:p>
-          <a:p>
-            <a:pPr indent="0" lvl="0" marL="0" rtl="0" algn="l">
-              <a:lnSpc>
-                <a:spcPct val="115000"/>
-              </a:lnSpc>
-              <a:spcBef>
-                <a:spcPts val="1200"/>
-              </a:spcBef>
-              <a:spcAft>
-                <a:spcPts val="0"/>
-              </a:spcAft>
-              <a:buClr>
-                <a:schemeClr val="dk1"/>
-              </a:buClr>
-              <a:buSzPts val="1100"/>
-              <a:buFont typeface="Arial"/>
-              <a:buNone/>
-            </a:pPr>
-            <a:r>
-              <a:rPr lang="en-US" sz="2000">
-                <a:latin typeface="Times New Roman"/>
-                <a:ea typeface="Times New Roman"/>
-                <a:cs typeface="Times New Roman"/>
-                <a:sym typeface="Times New Roman"/>
-              </a:rPr>
-              <a:t>Adopting these habits can help students achieve better focus, reduced stress, and improved sleep quality.</a:t>
+              <a:t>The machine learning model confirms a negative relationship between screen time and productivity.</a:t>
             </a:r>
             <a:endParaRPr sz="2000">
               <a:latin typeface="Times New Roman"/>
@@ -13740,7 +13784,7 @@
   <p:cSld>
     <p:spTree>
       <p:nvGrpSpPr>
-        <p:cNvPr id="170" name="Shape 170"/>
+        <p:cNvPr id="168" name="Shape 168"/>
         <p:cNvGrpSpPr/>
         <p:nvPr/>
       </p:nvGrpSpPr>
@@ -13754,7 +13798,7 @@
       </p:grpSpPr>
       <p:sp>
         <p:nvSpPr>
-          <p:cNvPr id="171" name="Google Shape;171;g3e6813604e6_1_93"/>
+          <p:cNvPr id="169" name="Google Shape;169;g3e6813604e6_1_78"/>
           <p:cNvSpPr txBox="1"/>
           <p:nvPr>
             <p:ph type="title"/>
@@ -13762,8 +13806,8 @@
         </p:nvSpPr>
         <p:spPr>
           <a:xfrm>
-            <a:off x="457200" y="439625"/>
-            <a:ext cx="5028900" cy="474300"/>
+            <a:off x="457200" y="0"/>
+            <a:ext cx="5028900" cy="914100"/>
           </a:xfrm>
           <a:prstGeom prst="rect">
             <a:avLst/>
@@ -13776,20 +13820,12 @@
           <a:lstStyle/>
           <a:p>
             <a:pPr indent="0" lvl="0" marL="0" rtl="0" algn="l">
-              <a:lnSpc>
-                <a:spcPct val="115000"/>
-              </a:lnSpc>
-              <a:spcBef>
-                <a:spcPts val="2400"/>
-              </a:spcBef>
-              <a:spcAft>
-                <a:spcPts val="0"/>
-              </a:spcAft>
-              <a:buClr>
-                <a:schemeClr val="dk1"/>
-              </a:buClr>
-              <a:buSzPts val="1100"/>
-              <a:buFont typeface="Arial"/>
+              <a:spcBef>
+                <a:spcPts val="0"/>
+              </a:spcBef>
+              <a:spcAft>
+                <a:spcPts val="0"/>
+              </a:spcAft>
               <a:buNone/>
             </a:pPr>
             <a:r>
@@ -13799,27 +13835,7 @@
                 <a:cs typeface="Times New Roman"/>
                 <a:sym typeface="Times New Roman"/>
               </a:rPr>
-              <a:t>Future Work</a:t>
-            </a:r>
-            <a:endParaRPr sz="3200">
-              <a:latin typeface="Times New Roman"/>
-              <a:ea typeface="Times New Roman"/>
-              <a:cs typeface="Times New Roman"/>
-              <a:sym typeface="Times New Roman"/>
-            </a:endParaRPr>
-          </a:p>
-          <a:p>
-            <a:pPr indent="0" lvl="0" marL="0" rtl="0" algn="l">
-              <a:spcBef>
-                <a:spcPts val="600"/>
-              </a:spcBef>
-              <a:spcAft>
-                <a:spcPts val="0"/>
-              </a:spcAft>
-              <a:buNone/>
-            </a:pPr>
-            <a:r>
-              <a:t/>
+              <a:t>Conclusion</a:t>
             </a:r>
             <a:endParaRPr sz="3200">
               <a:latin typeface="Times New Roman"/>
@@ -13832,7 +13848,7 @@
       </p:sp>
       <p:sp>
         <p:nvSpPr>
-          <p:cNvPr id="172" name="Google Shape;172;g3e6813604e6_1_93"/>
+          <p:cNvPr id="170" name="Google Shape;170;g3e6813604e6_1_78"/>
           <p:cNvSpPr txBox="1"/>
           <p:nvPr>
             <p:ph idx="1" type="body"/>
@@ -13840,8 +13856,8 @@
         </p:nvSpPr>
         <p:spPr>
           <a:xfrm>
-            <a:off x="457200" y="1154001"/>
-            <a:ext cx="8229300" cy="4428000"/>
+            <a:off x="457200" y="1135676"/>
+            <a:ext cx="8229300" cy="4446300"/>
           </a:xfrm>
           <a:prstGeom prst="rect">
             <a:avLst/>
@@ -13849,7 +13865,7 @@
         </p:spPr>
         <p:txBody>
           <a:bodyPr anchorCtr="0" anchor="t" bIns="0" lIns="0" spcFirstLastPara="1" rIns="0" wrap="square" tIns="0">
-            <a:normAutofit/>
+            <a:noAutofit/>
           </a:bodyPr>
           <a:lstStyle/>
           <a:p>
@@ -13877,7 +13893,7 @@
                 <a:cs typeface="Times New Roman"/>
                 <a:sym typeface="Times New Roman"/>
               </a:rPr>
-              <a:t>The study can be extended in the following ways:</a:t>
+              <a:t>This study highlights that screen time plays a significant role in influencing students’ productivity and mental well-being.</a:t>
             </a:r>
             <a:endParaRPr sz="2000">
               <a:latin typeface="Times New Roman"/>
@@ -13908,7 +13924,100 @@
                 <a:cs typeface="Times New Roman"/>
                 <a:sym typeface="Times New Roman"/>
               </a:rPr>
-              <a:t>Use advanced machine learning models for better prediction</a:t>
+              <a:t>Excessive screen usage leads to:</a:t>
+            </a:r>
+            <a:endParaRPr sz="2000">
+              <a:latin typeface="Times New Roman"/>
+              <a:ea typeface="Times New Roman"/>
+              <a:cs typeface="Times New Roman"/>
+              <a:sym typeface="Times New Roman"/>
+            </a:endParaRPr>
+          </a:p>
+          <a:p>
+            <a:pPr indent="-355600" lvl="1" marL="914400" rtl="0" algn="l">
+              <a:lnSpc>
+                <a:spcPct val="115000"/>
+              </a:lnSpc>
+              <a:spcBef>
+                <a:spcPts val="0"/>
+              </a:spcBef>
+              <a:spcAft>
+                <a:spcPts val="0"/>
+              </a:spcAft>
+              <a:buSzPts val="2000"/>
+              <a:buFont typeface="Times New Roman"/>
+              <a:buChar char="○"/>
+            </a:pPr>
+            <a:r>
+              <a:rPr lang="en-US" sz="2000">
+                <a:latin typeface="Times New Roman"/>
+                <a:ea typeface="Times New Roman"/>
+                <a:cs typeface="Times New Roman"/>
+                <a:sym typeface="Times New Roman"/>
+              </a:rPr>
+              <a:t>Reduced productivity</a:t>
+            </a:r>
+            <a:endParaRPr sz="2000">
+              <a:latin typeface="Times New Roman"/>
+              <a:ea typeface="Times New Roman"/>
+              <a:cs typeface="Times New Roman"/>
+              <a:sym typeface="Times New Roman"/>
+            </a:endParaRPr>
+          </a:p>
+          <a:p>
+            <a:pPr indent="-355600" lvl="1" marL="914400" rtl="0" algn="l">
+              <a:lnSpc>
+                <a:spcPct val="115000"/>
+              </a:lnSpc>
+              <a:spcBef>
+                <a:spcPts val="0"/>
+              </a:spcBef>
+              <a:spcAft>
+                <a:spcPts val="0"/>
+              </a:spcAft>
+              <a:buSzPts val="2000"/>
+              <a:buFont typeface="Times New Roman"/>
+              <a:buChar char="○"/>
+            </a:pPr>
+            <a:r>
+              <a:rPr lang="en-US" sz="2000">
+                <a:latin typeface="Times New Roman"/>
+                <a:ea typeface="Times New Roman"/>
+                <a:cs typeface="Times New Roman"/>
+                <a:sym typeface="Times New Roman"/>
+              </a:rPr>
+              <a:t>Increased stress levels</a:t>
+            </a:r>
+            <a:endParaRPr sz="2000">
+              <a:latin typeface="Times New Roman"/>
+              <a:ea typeface="Times New Roman"/>
+              <a:cs typeface="Times New Roman"/>
+              <a:sym typeface="Times New Roman"/>
+            </a:endParaRPr>
+          </a:p>
+          <a:p>
+            <a:pPr indent="-355600" lvl="1" marL="914400" rtl="0" algn="l">
+              <a:lnSpc>
+                <a:spcPct val="115000"/>
+              </a:lnSpc>
+              <a:spcBef>
+                <a:spcPts val="0"/>
+              </a:spcBef>
+              <a:spcAft>
+                <a:spcPts val="0"/>
+              </a:spcAft>
+              <a:buSzPts val="2000"/>
+              <a:buFont typeface="Times New Roman"/>
+              <a:buChar char="○"/>
+            </a:pPr>
+            <a:r>
+              <a:rPr lang="en-US" sz="2000">
+                <a:latin typeface="Times New Roman"/>
+                <a:ea typeface="Times New Roman"/>
+                <a:cs typeface="Times New Roman"/>
+                <a:sym typeface="Times New Roman"/>
+              </a:rPr>
+              <a:t>Poor sleep quality</a:t>
             </a:r>
             <a:endParaRPr sz="2000">
               <a:latin typeface="Times New Roman"/>
@@ -13939,69 +14048,7 @@
                 <a:cs typeface="Times New Roman"/>
                 <a:sym typeface="Times New Roman"/>
               </a:rPr>
-              <a:t>Increase dataset size for more accurate results</a:t>
-            </a:r>
-            <a:endParaRPr sz="2000">
-              <a:latin typeface="Times New Roman"/>
-              <a:ea typeface="Times New Roman"/>
-              <a:cs typeface="Times New Roman"/>
-              <a:sym typeface="Times New Roman"/>
-            </a:endParaRPr>
-          </a:p>
-          <a:p>
-            <a:pPr indent="-355600" lvl="0" marL="457200" rtl="0" algn="l">
-              <a:lnSpc>
-                <a:spcPct val="115000"/>
-              </a:lnSpc>
-              <a:spcBef>
-                <a:spcPts val="0"/>
-              </a:spcBef>
-              <a:spcAft>
-                <a:spcPts val="0"/>
-              </a:spcAft>
-              <a:buSzPts val="2000"/>
-              <a:buFont typeface="Times New Roman"/>
-              <a:buChar char="●"/>
-            </a:pPr>
-            <a:r>
-              <a:rPr lang="en-US" sz="2000">
-                <a:latin typeface="Times New Roman"/>
-                <a:ea typeface="Times New Roman"/>
-                <a:cs typeface="Times New Roman"/>
-                <a:sym typeface="Times New Roman"/>
-              </a:rPr>
-              <a:t>Collect real-time data using apps or tracking tools</a:t>
-            </a:r>
-            <a:endParaRPr sz="2000">
-              <a:latin typeface="Times New Roman"/>
-              <a:ea typeface="Times New Roman"/>
-              <a:cs typeface="Times New Roman"/>
-              <a:sym typeface="Times New Roman"/>
-            </a:endParaRPr>
-          </a:p>
-          <a:p>
-            <a:pPr indent="-355600" lvl="0" marL="457200" rtl="0" algn="l">
-              <a:lnSpc>
-                <a:spcPct val="115000"/>
-              </a:lnSpc>
-              <a:spcBef>
-                <a:spcPts val="0"/>
-              </a:spcBef>
-              <a:spcAft>
-                <a:spcPts val="0"/>
-              </a:spcAft>
-              <a:buSzPts val="2000"/>
-              <a:buFont typeface="Times New Roman"/>
-              <a:buChar char="●"/>
-            </a:pPr>
-            <a:r>
-              <a:rPr lang="en-US" sz="2000">
-                <a:latin typeface="Times New Roman"/>
-                <a:ea typeface="Times New Roman"/>
-                <a:cs typeface="Times New Roman"/>
-                <a:sym typeface="Times New Roman"/>
-              </a:rPr>
-              <a:t>Analyze additional factors such as physical activity and lifestyle</a:t>
+              <a:t>Controlled and mindful usage of digital devices can improve overall performance and well-being</a:t>
             </a:r>
             <a:endParaRPr sz="2000">
               <a:latin typeface="Times New Roman"/>
@@ -14035,7 +14082,7 @@
                 <a:cs typeface="Times New Roman"/>
                 <a:sym typeface="Times New Roman"/>
               </a:rPr>
-              <a:t>These improvements can provide deeper insights into the impact of screen time on students’ behavior and performance.</a:t>
+              <a:t>A data-driven and machine learning approach helps in better understanding and predicting these effects.</a:t>
             </a:r>
             <a:endParaRPr sz="2000">
               <a:latin typeface="Times New Roman"/>
@@ -14079,7 +14126,7 @@
   <p:cSld>
     <p:spTree>
       <p:nvGrpSpPr>
-        <p:cNvPr id="176" name="Shape 176"/>
+        <p:cNvPr id="175" name="Shape 175"/>
         <p:cNvGrpSpPr/>
         <p:nvPr/>
       </p:nvGrpSpPr>
@@ -14093,7 +14140,688 @@
       </p:grpSpPr>
       <p:sp>
         <p:nvSpPr>
-          <p:cNvPr id="177" name="Google Shape;177;p3"/>
+          <p:cNvPr id="176" name="Google Shape;176;g3e6813604e6_1_85"/>
+          <p:cNvSpPr txBox="1"/>
+          <p:nvPr>
+            <p:ph type="title"/>
+          </p:nvPr>
+        </p:nvSpPr>
+        <p:spPr>
+          <a:xfrm>
+            <a:off x="457200" y="0"/>
+            <a:ext cx="5028900" cy="914100"/>
+          </a:xfrm>
+          <a:prstGeom prst="rect">
+            <a:avLst/>
+          </a:prstGeom>
+        </p:spPr>
+        <p:txBody>
+          <a:bodyPr anchorCtr="0" anchor="ctr" bIns="0" lIns="0" spcFirstLastPara="1" rIns="0" wrap="square" tIns="0">
+            <a:noAutofit/>
+          </a:bodyPr>
+          <a:lstStyle/>
+          <a:p>
+            <a:pPr indent="0" lvl="0" marL="0" rtl="0" algn="l">
+              <a:spcBef>
+                <a:spcPts val="0"/>
+              </a:spcBef>
+              <a:spcAft>
+                <a:spcPts val="0"/>
+              </a:spcAft>
+              <a:buNone/>
+            </a:pPr>
+            <a:r>
+              <a:rPr lang="en-US" sz="3200">
+                <a:latin typeface="Times New Roman"/>
+                <a:ea typeface="Times New Roman"/>
+                <a:cs typeface="Times New Roman"/>
+                <a:sym typeface="Times New Roman"/>
+              </a:rPr>
+              <a:t>Recommendations </a:t>
+            </a:r>
+            <a:endParaRPr sz="3200">
+              <a:latin typeface="Times New Roman"/>
+              <a:ea typeface="Times New Roman"/>
+              <a:cs typeface="Times New Roman"/>
+              <a:sym typeface="Times New Roman"/>
+            </a:endParaRPr>
+          </a:p>
+        </p:txBody>
+      </p:sp>
+      <p:sp>
+        <p:nvSpPr>
+          <p:cNvPr id="177" name="Google Shape;177;g3e6813604e6_1_85"/>
+          <p:cNvSpPr txBox="1"/>
+          <p:nvPr>
+            <p:ph idx="1" type="body"/>
+          </p:nvPr>
+        </p:nvSpPr>
+        <p:spPr>
+          <a:xfrm>
+            <a:off x="457200" y="1117351"/>
+            <a:ext cx="8229300" cy="4464600"/>
+          </a:xfrm>
+          <a:prstGeom prst="rect">
+            <a:avLst/>
+          </a:prstGeom>
+        </p:spPr>
+        <p:txBody>
+          <a:bodyPr anchorCtr="0" anchor="t" bIns="0" lIns="0" spcFirstLastPara="1" rIns="0" wrap="square" tIns="0">
+            <a:normAutofit/>
+          </a:bodyPr>
+          <a:lstStyle/>
+          <a:p>
+            <a:pPr indent="0" lvl="0" marL="0" rtl="0" algn="l">
+              <a:lnSpc>
+                <a:spcPct val="115000"/>
+              </a:lnSpc>
+              <a:spcBef>
+                <a:spcPts val="1200"/>
+              </a:spcBef>
+              <a:spcAft>
+                <a:spcPts val="0"/>
+              </a:spcAft>
+              <a:buClr>
+                <a:schemeClr val="dk1"/>
+              </a:buClr>
+              <a:buSzPts val="1100"/>
+              <a:buFont typeface="Arial"/>
+              <a:buNone/>
+            </a:pPr>
+            <a:r>
+              <a:rPr lang="en-US" sz="2000">
+                <a:latin typeface="Times New Roman"/>
+                <a:ea typeface="Times New Roman"/>
+                <a:cs typeface="Times New Roman"/>
+                <a:sym typeface="Times New Roman"/>
+              </a:rPr>
+              <a:t>To improve productivity and mental well-being, the following measures are suggested:</a:t>
+            </a:r>
+            <a:endParaRPr sz="2000">
+              <a:latin typeface="Times New Roman"/>
+              <a:ea typeface="Times New Roman"/>
+              <a:cs typeface="Times New Roman"/>
+              <a:sym typeface="Times New Roman"/>
+            </a:endParaRPr>
+          </a:p>
+          <a:p>
+            <a:pPr indent="-355600" lvl="0" marL="457200" rtl="0" algn="l">
+              <a:lnSpc>
+                <a:spcPct val="115000"/>
+              </a:lnSpc>
+              <a:spcBef>
+                <a:spcPts val="1200"/>
+              </a:spcBef>
+              <a:spcAft>
+                <a:spcPts val="0"/>
+              </a:spcAft>
+              <a:buSzPts val="2000"/>
+              <a:buFont typeface="Times New Roman"/>
+              <a:buChar char="●"/>
+            </a:pPr>
+            <a:r>
+              <a:rPr lang="en-US" sz="2000">
+                <a:latin typeface="Times New Roman"/>
+                <a:ea typeface="Times New Roman"/>
+                <a:cs typeface="Times New Roman"/>
+                <a:sym typeface="Times New Roman"/>
+              </a:rPr>
+              <a:t>Limit non-academic screen time</a:t>
+            </a:r>
+            <a:endParaRPr sz="2000">
+              <a:latin typeface="Times New Roman"/>
+              <a:ea typeface="Times New Roman"/>
+              <a:cs typeface="Times New Roman"/>
+              <a:sym typeface="Times New Roman"/>
+            </a:endParaRPr>
+          </a:p>
+          <a:p>
+            <a:pPr indent="-355600" lvl="0" marL="457200" rtl="0" algn="l">
+              <a:lnSpc>
+                <a:spcPct val="115000"/>
+              </a:lnSpc>
+              <a:spcBef>
+                <a:spcPts val="0"/>
+              </a:spcBef>
+              <a:spcAft>
+                <a:spcPts val="0"/>
+              </a:spcAft>
+              <a:buSzPts val="2000"/>
+              <a:buFont typeface="Times New Roman"/>
+              <a:buChar char="●"/>
+            </a:pPr>
+            <a:r>
+              <a:rPr lang="en-US" sz="2000">
+                <a:latin typeface="Times New Roman"/>
+                <a:ea typeface="Times New Roman"/>
+                <a:cs typeface="Times New Roman"/>
+                <a:sym typeface="Times New Roman"/>
+              </a:rPr>
+              <a:t>Take regular breaks during screen usage</a:t>
+            </a:r>
+            <a:endParaRPr sz="2000">
+              <a:latin typeface="Times New Roman"/>
+              <a:ea typeface="Times New Roman"/>
+              <a:cs typeface="Times New Roman"/>
+              <a:sym typeface="Times New Roman"/>
+            </a:endParaRPr>
+          </a:p>
+          <a:p>
+            <a:pPr indent="-355600" lvl="0" marL="457200" rtl="0" algn="l">
+              <a:lnSpc>
+                <a:spcPct val="115000"/>
+              </a:lnSpc>
+              <a:spcBef>
+                <a:spcPts val="0"/>
+              </a:spcBef>
+              <a:spcAft>
+                <a:spcPts val="0"/>
+              </a:spcAft>
+              <a:buSzPts val="2000"/>
+              <a:buFont typeface="Times New Roman"/>
+              <a:buChar char="●"/>
+            </a:pPr>
+            <a:r>
+              <a:rPr lang="en-US" sz="2000">
+                <a:latin typeface="Times New Roman"/>
+                <a:ea typeface="Times New Roman"/>
+                <a:cs typeface="Times New Roman"/>
+                <a:sym typeface="Times New Roman"/>
+              </a:rPr>
+              <a:t>Avoid screen exposure before sleep</a:t>
+            </a:r>
+            <a:endParaRPr sz="2000">
+              <a:latin typeface="Times New Roman"/>
+              <a:ea typeface="Times New Roman"/>
+              <a:cs typeface="Times New Roman"/>
+              <a:sym typeface="Times New Roman"/>
+            </a:endParaRPr>
+          </a:p>
+          <a:p>
+            <a:pPr indent="-355600" lvl="0" marL="457200" rtl="0" algn="l">
+              <a:lnSpc>
+                <a:spcPct val="115000"/>
+              </a:lnSpc>
+              <a:spcBef>
+                <a:spcPts val="0"/>
+              </a:spcBef>
+              <a:spcAft>
+                <a:spcPts val="0"/>
+              </a:spcAft>
+              <a:buSzPts val="2000"/>
+              <a:buFont typeface="Times New Roman"/>
+              <a:buChar char="●"/>
+            </a:pPr>
+            <a:r>
+              <a:rPr lang="en-US" sz="2000">
+                <a:latin typeface="Times New Roman"/>
+                <a:ea typeface="Times New Roman"/>
+                <a:cs typeface="Times New Roman"/>
+                <a:sym typeface="Times New Roman"/>
+              </a:rPr>
+              <a:t>Maintain a balanced daily routine</a:t>
+            </a:r>
+            <a:endParaRPr sz="2000">
+              <a:latin typeface="Times New Roman"/>
+              <a:ea typeface="Times New Roman"/>
+              <a:cs typeface="Times New Roman"/>
+              <a:sym typeface="Times New Roman"/>
+            </a:endParaRPr>
+          </a:p>
+          <a:p>
+            <a:pPr indent="-355600" lvl="0" marL="457200" rtl="0" algn="l">
+              <a:lnSpc>
+                <a:spcPct val="115000"/>
+              </a:lnSpc>
+              <a:spcBef>
+                <a:spcPts val="0"/>
+              </a:spcBef>
+              <a:spcAft>
+                <a:spcPts val="0"/>
+              </a:spcAft>
+              <a:buSzPts val="2000"/>
+              <a:buFont typeface="Times New Roman"/>
+              <a:buChar char="●"/>
+            </a:pPr>
+            <a:r>
+              <a:rPr lang="en-US" sz="2000">
+                <a:latin typeface="Times New Roman"/>
+                <a:ea typeface="Times New Roman"/>
+                <a:cs typeface="Times New Roman"/>
+                <a:sym typeface="Times New Roman"/>
+              </a:rPr>
+              <a:t>Practice digital detox to reduce dependency</a:t>
+            </a:r>
+            <a:endParaRPr sz="2000">
+              <a:latin typeface="Times New Roman"/>
+              <a:ea typeface="Times New Roman"/>
+              <a:cs typeface="Times New Roman"/>
+              <a:sym typeface="Times New Roman"/>
+            </a:endParaRPr>
+          </a:p>
+          <a:p>
+            <a:pPr indent="0" lvl="0" marL="0" rtl="0" algn="l">
+              <a:lnSpc>
+                <a:spcPct val="115000"/>
+              </a:lnSpc>
+              <a:spcBef>
+                <a:spcPts val="1200"/>
+              </a:spcBef>
+              <a:spcAft>
+                <a:spcPts val="0"/>
+              </a:spcAft>
+              <a:buClr>
+                <a:schemeClr val="dk1"/>
+              </a:buClr>
+              <a:buSzPts val="1100"/>
+              <a:buFont typeface="Arial"/>
+              <a:buNone/>
+            </a:pPr>
+            <a:r>
+              <a:rPr lang="en-US" sz="2000">
+                <a:latin typeface="Times New Roman"/>
+                <a:ea typeface="Times New Roman"/>
+                <a:cs typeface="Times New Roman"/>
+                <a:sym typeface="Times New Roman"/>
+              </a:rPr>
+              <a:t>Adopting these habits can help students achieve better focus, reduced stress, and improved sleep quality.</a:t>
+            </a:r>
+            <a:endParaRPr sz="2000">
+              <a:latin typeface="Times New Roman"/>
+              <a:ea typeface="Times New Roman"/>
+              <a:cs typeface="Times New Roman"/>
+              <a:sym typeface="Times New Roman"/>
+            </a:endParaRPr>
+          </a:p>
+          <a:p>
+            <a:pPr indent="0" lvl="0" marL="0" rtl="0" algn="l">
+              <a:spcBef>
+                <a:spcPts val="1200"/>
+              </a:spcBef>
+              <a:spcAft>
+                <a:spcPts val="0"/>
+              </a:spcAft>
+              <a:buNone/>
+            </a:pPr>
+            <a:r>
+              <a:t/>
+            </a:r>
+            <a:endParaRPr sz="2000">
+              <a:latin typeface="Times New Roman"/>
+              <a:ea typeface="Times New Roman"/>
+              <a:cs typeface="Times New Roman"/>
+              <a:sym typeface="Times New Roman"/>
+            </a:endParaRPr>
+          </a:p>
+        </p:txBody>
+      </p:sp>
+    </p:spTree>
+  </p:cSld>
+  <p:clrMapOvr>
+    <a:masterClrMapping/>
+  </p:clrMapOvr>
+</p:sld>
+</file>
+
+<file path=ppt/slides/slide15.xml><?xml version="1.0" encoding="utf-8"?>
+<p:sld xmlns:a="http://schemas.openxmlformats.org/drawingml/2006/main" xmlns:r="http://schemas.openxmlformats.org/officeDocument/2006/relationships" xmlns:mc="http://schemas.openxmlformats.org/markup-compatibility/2006" xmlns:mv="urn:schemas-microsoft-com:mac:vml" xmlns:p="http://schemas.openxmlformats.org/presentationml/2006/main" xmlns:c="http://schemas.openxmlformats.org/drawingml/2006/chart" xmlns:dgm="http://schemas.openxmlformats.org/drawingml/2006/diagram" xmlns:o="urn:schemas-microsoft-com:office:office" xmlns:v="urn:schemas-microsoft-com:vml" xmlns:pvml="urn:schemas-microsoft-com:office:powerpoint" xmlns:com="http://schemas.openxmlformats.org/drawingml/2006/compatibility" xmlns:p14="http://schemas.microsoft.com/office/powerpoint/2010/main" xmlns:p15="http://schemas.microsoft.com/office/powerpoint/2012/main" xmlns:ahyp="http://schemas.microsoft.com/office/drawing/2018/hyperlinkcolor">
+  <p:cSld>
+    <p:spTree>
+      <p:nvGrpSpPr>
+        <p:cNvPr id="182" name="Shape 182"/>
+        <p:cNvGrpSpPr/>
+        <p:nvPr/>
+      </p:nvGrpSpPr>
+      <p:grpSpPr>
+        <a:xfrm>
+          <a:off x="0" y="0"/>
+          <a:ext cx="0" cy="0"/>
+          <a:chOff x="0" y="0"/>
+          <a:chExt cx="0" cy="0"/>
+        </a:xfrm>
+      </p:grpSpPr>
+      <p:sp>
+        <p:nvSpPr>
+          <p:cNvPr id="183" name="Google Shape;183;g3e6813604e6_1_93"/>
+          <p:cNvSpPr txBox="1"/>
+          <p:nvPr>
+            <p:ph type="title"/>
+          </p:nvPr>
+        </p:nvSpPr>
+        <p:spPr>
+          <a:xfrm>
+            <a:off x="457200" y="439625"/>
+            <a:ext cx="5028900" cy="474300"/>
+          </a:xfrm>
+          <a:prstGeom prst="rect">
+            <a:avLst/>
+          </a:prstGeom>
+        </p:spPr>
+        <p:txBody>
+          <a:bodyPr anchorCtr="0" anchor="ctr" bIns="0" lIns="0" spcFirstLastPara="1" rIns="0" wrap="square" tIns="0">
+            <a:noAutofit/>
+          </a:bodyPr>
+          <a:lstStyle/>
+          <a:p>
+            <a:pPr indent="0" lvl="0" marL="0" rtl="0" algn="l">
+              <a:lnSpc>
+                <a:spcPct val="115000"/>
+              </a:lnSpc>
+              <a:spcBef>
+                <a:spcPts val="2400"/>
+              </a:spcBef>
+              <a:spcAft>
+                <a:spcPts val="0"/>
+              </a:spcAft>
+              <a:buClr>
+                <a:schemeClr val="dk1"/>
+              </a:buClr>
+              <a:buSzPts val="1100"/>
+              <a:buFont typeface="Arial"/>
+              <a:buNone/>
+            </a:pPr>
+            <a:r>
+              <a:rPr lang="en-US" sz="3200">
+                <a:latin typeface="Times New Roman"/>
+                <a:ea typeface="Times New Roman"/>
+                <a:cs typeface="Times New Roman"/>
+                <a:sym typeface="Times New Roman"/>
+              </a:rPr>
+              <a:t>Future Work</a:t>
+            </a:r>
+            <a:endParaRPr sz="3200">
+              <a:latin typeface="Times New Roman"/>
+              <a:ea typeface="Times New Roman"/>
+              <a:cs typeface="Times New Roman"/>
+              <a:sym typeface="Times New Roman"/>
+            </a:endParaRPr>
+          </a:p>
+          <a:p>
+            <a:pPr indent="0" lvl="0" marL="0" rtl="0" algn="l">
+              <a:spcBef>
+                <a:spcPts val="600"/>
+              </a:spcBef>
+              <a:spcAft>
+                <a:spcPts val="0"/>
+              </a:spcAft>
+              <a:buNone/>
+            </a:pPr>
+            <a:r>
+              <a:t/>
+            </a:r>
+            <a:endParaRPr sz="3200">
+              <a:latin typeface="Times New Roman"/>
+              <a:ea typeface="Times New Roman"/>
+              <a:cs typeface="Times New Roman"/>
+              <a:sym typeface="Times New Roman"/>
+            </a:endParaRPr>
+          </a:p>
+        </p:txBody>
+      </p:sp>
+      <p:sp>
+        <p:nvSpPr>
+          <p:cNvPr id="184" name="Google Shape;184;g3e6813604e6_1_93"/>
+          <p:cNvSpPr txBox="1"/>
+          <p:nvPr>
+            <p:ph idx="1" type="body"/>
+          </p:nvPr>
+        </p:nvSpPr>
+        <p:spPr>
+          <a:xfrm>
+            <a:off x="457200" y="1154001"/>
+            <a:ext cx="8229300" cy="4428000"/>
+          </a:xfrm>
+          <a:prstGeom prst="rect">
+            <a:avLst/>
+          </a:prstGeom>
+        </p:spPr>
+        <p:txBody>
+          <a:bodyPr anchorCtr="0" anchor="t" bIns="0" lIns="0" spcFirstLastPara="1" rIns="0" wrap="square" tIns="0">
+            <a:normAutofit/>
+          </a:bodyPr>
+          <a:lstStyle/>
+          <a:p>
+            <a:pPr indent="0" lvl="0" marL="0" rtl="0" algn="l">
+              <a:lnSpc>
+                <a:spcPct val="115000"/>
+              </a:lnSpc>
+              <a:spcBef>
+                <a:spcPts val="1200"/>
+              </a:spcBef>
+              <a:spcAft>
+                <a:spcPts val="0"/>
+              </a:spcAft>
+              <a:buClr>
+                <a:schemeClr val="dk1"/>
+              </a:buClr>
+              <a:buSzPts val="1100"/>
+              <a:buFont typeface="Arial"/>
+              <a:buNone/>
+            </a:pPr>
+            <a:r>
+              <a:rPr lang="en-US" sz="2000">
+                <a:latin typeface="Times New Roman"/>
+                <a:ea typeface="Times New Roman"/>
+                <a:cs typeface="Times New Roman"/>
+                <a:sym typeface="Times New Roman"/>
+              </a:rPr>
+              <a:t>The study can be extended in the following ways:</a:t>
+            </a:r>
+            <a:endParaRPr sz="2000">
+              <a:latin typeface="Times New Roman"/>
+              <a:ea typeface="Times New Roman"/>
+              <a:cs typeface="Times New Roman"/>
+              <a:sym typeface="Times New Roman"/>
+            </a:endParaRPr>
+          </a:p>
+          <a:p>
+            <a:pPr indent="-355600" lvl="0" marL="457200" rtl="0" algn="l">
+              <a:lnSpc>
+                <a:spcPct val="115000"/>
+              </a:lnSpc>
+              <a:spcBef>
+                <a:spcPts val="1200"/>
+              </a:spcBef>
+              <a:spcAft>
+                <a:spcPts val="0"/>
+              </a:spcAft>
+              <a:buSzPts val="2000"/>
+              <a:buFont typeface="Times New Roman"/>
+              <a:buChar char="●"/>
+            </a:pPr>
+            <a:r>
+              <a:rPr lang="en-US" sz="2000">
+                <a:latin typeface="Times New Roman"/>
+                <a:ea typeface="Times New Roman"/>
+                <a:cs typeface="Times New Roman"/>
+                <a:sym typeface="Times New Roman"/>
+              </a:rPr>
+              <a:t>Use advanced machine learning models for better prediction</a:t>
+            </a:r>
+            <a:endParaRPr sz="2000">
+              <a:latin typeface="Times New Roman"/>
+              <a:ea typeface="Times New Roman"/>
+              <a:cs typeface="Times New Roman"/>
+              <a:sym typeface="Times New Roman"/>
+            </a:endParaRPr>
+          </a:p>
+          <a:p>
+            <a:pPr indent="-355600" lvl="0" marL="457200" rtl="0" algn="l">
+              <a:lnSpc>
+                <a:spcPct val="115000"/>
+              </a:lnSpc>
+              <a:spcBef>
+                <a:spcPts val="0"/>
+              </a:spcBef>
+              <a:spcAft>
+                <a:spcPts val="0"/>
+              </a:spcAft>
+              <a:buSzPts val="2000"/>
+              <a:buFont typeface="Times New Roman"/>
+              <a:buChar char="●"/>
+            </a:pPr>
+            <a:r>
+              <a:rPr lang="en-US" sz="2000">
+                <a:latin typeface="Times New Roman"/>
+                <a:ea typeface="Times New Roman"/>
+                <a:cs typeface="Times New Roman"/>
+                <a:sym typeface="Times New Roman"/>
+              </a:rPr>
+              <a:t>Increase dataset size for more accurate results</a:t>
+            </a:r>
+            <a:endParaRPr sz="2000">
+              <a:latin typeface="Times New Roman"/>
+              <a:ea typeface="Times New Roman"/>
+              <a:cs typeface="Times New Roman"/>
+              <a:sym typeface="Times New Roman"/>
+            </a:endParaRPr>
+          </a:p>
+          <a:p>
+            <a:pPr indent="-355600" lvl="0" marL="457200" rtl="0" algn="l">
+              <a:lnSpc>
+                <a:spcPct val="115000"/>
+              </a:lnSpc>
+              <a:spcBef>
+                <a:spcPts val="0"/>
+              </a:spcBef>
+              <a:spcAft>
+                <a:spcPts val="0"/>
+              </a:spcAft>
+              <a:buSzPts val="2000"/>
+              <a:buFont typeface="Times New Roman"/>
+              <a:buChar char="●"/>
+            </a:pPr>
+            <a:r>
+              <a:rPr lang="en-US" sz="2000">
+                <a:latin typeface="Times New Roman"/>
+                <a:ea typeface="Times New Roman"/>
+                <a:cs typeface="Times New Roman"/>
+                <a:sym typeface="Times New Roman"/>
+              </a:rPr>
+              <a:t>Collect real-time data using apps or tracking tools</a:t>
+            </a:r>
+            <a:endParaRPr sz="2000">
+              <a:latin typeface="Times New Roman"/>
+              <a:ea typeface="Times New Roman"/>
+              <a:cs typeface="Times New Roman"/>
+              <a:sym typeface="Times New Roman"/>
+            </a:endParaRPr>
+          </a:p>
+          <a:p>
+            <a:pPr indent="-355600" lvl="0" marL="457200" rtl="0" algn="l">
+              <a:lnSpc>
+                <a:spcPct val="115000"/>
+              </a:lnSpc>
+              <a:spcBef>
+                <a:spcPts val="0"/>
+              </a:spcBef>
+              <a:spcAft>
+                <a:spcPts val="0"/>
+              </a:spcAft>
+              <a:buSzPts val="2000"/>
+              <a:buFont typeface="Times New Roman"/>
+              <a:buChar char="●"/>
+            </a:pPr>
+            <a:r>
+              <a:rPr lang="en-US" sz="2000">
+                <a:latin typeface="Times New Roman"/>
+                <a:ea typeface="Times New Roman"/>
+                <a:cs typeface="Times New Roman"/>
+                <a:sym typeface="Times New Roman"/>
+              </a:rPr>
+              <a:t>Analyze additional factors such as physical activity and lifestyle</a:t>
+            </a:r>
+            <a:endParaRPr sz="2000">
+              <a:latin typeface="Times New Roman"/>
+              <a:ea typeface="Times New Roman"/>
+              <a:cs typeface="Times New Roman"/>
+              <a:sym typeface="Times New Roman"/>
+            </a:endParaRPr>
+          </a:p>
+          <a:p>
+            <a:pPr indent="0" lvl="0" marL="0" rtl="0" algn="l">
+              <a:lnSpc>
+                <a:spcPct val="115000"/>
+              </a:lnSpc>
+              <a:spcBef>
+                <a:spcPts val="1200"/>
+              </a:spcBef>
+              <a:spcAft>
+                <a:spcPts val="0"/>
+              </a:spcAft>
+              <a:buClr>
+                <a:schemeClr val="dk1"/>
+              </a:buClr>
+              <a:buSzPts val="1100"/>
+              <a:buFont typeface="Arial"/>
+              <a:buNone/>
+            </a:pPr>
+            <a:r>
+              <a:rPr lang="en-US" sz="2000">
+                <a:latin typeface="Times New Roman"/>
+                <a:ea typeface="Times New Roman"/>
+                <a:cs typeface="Times New Roman"/>
+                <a:sym typeface="Times New Roman"/>
+              </a:rPr>
+              <a:t>These improvements can provide deeper insights into the impact of screen time on students’ behavior and performance.</a:t>
+            </a:r>
+            <a:endParaRPr sz="2000">
+              <a:latin typeface="Times New Roman"/>
+              <a:ea typeface="Times New Roman"/>
+              <a:cs typeface="Times New Roman"/>
+              <a:sym typeface="Times New Roman"/>
+            </a:endParaRPr>
+          </a:p>
+          <a:p>
+            <a:pPr indent="0" lvl="0" marL="0" rtl="0" algn="l">
+              <a:spcBef>
+                <a:spcPts val="1200"/>
+              </a:spcBef>
+              <a:spcAft>
+                <a:spcPts val="0"/>
+              </a:spcAft>
+              <a:buNone/>
+            </a:pPr>
+            <a:r>
+              <a:t/>
+            </a:r>
+            <a:endParaRPr sz="2000">
+              <a:latin typeface="Times New Roman"/>
+              <a:ea typeface="Times New Roman"/>
+              <a:cs typeface="Times New Roman"/>
+              <a:sym typeface="Times New Roman"/>
+            </a:endParaRPr>
+          </a:p>
+        </p:txBody>
+      </p:sp>
+    </p:spTree>
+  </p:cSld>
+  <p:clrMapOvr>
+    <a:masterClrMapping/>
+  </p:clrMapOvr>
+</p:sld>
+</file>
+
+<file path=ppt/slides/slide16.xml><?xml version="1.0" encoding="utf-8"?>
+<p:sld xmlns:a="http://schemas.openxmlformats.org/drawingml/2006/main" xmlns:r="http://schemas.openxmlformats.org/officeDocument/2006/relationships" xmlns:mc="http://schemas.openxmlformats.org/markup-compatibility/2006" xmlns:mv="urn:schemas-microsoft-com:mac:vml" xmlns:p="http://schemas.openxmlformats.org/presentationml/2006/main" xmlns:c="http://schemas.openxmlformats.org/drawingml/2006/chart" xmlns:dgm="http://schemas.openxmlformats.org/drawingml/2006/diagram" xmlns:o="urn:schemas-microsoft-com:office:office" xmlns:v="urn:schemas-microsoft-com:vml" xmlns:pvml="urn:schemas-microsoft-com:office:powerpoint" xmlns:com="http://schemas.openxmlformats.org/drawingml/2006/compatibility" xmlns:p14="http://schemas.microsoft.com/office/powerpoint/2010/main" xmlns:p15="http://schemas.microsoft.com/office/powerpoint/2012/main" xmlns:ahyp="http://schemas.microsoft.com/office/drawing/2018/hyperlinkcolor">
+  <p:cSld>
+    <p:spTree>
+      <p:nvGrpSpPr>
+        <p:cNvPr id="188" name="Shape 188"/>
+        <p:cNvGrpSpPr/>
+        <p:nvPr/>
+      </p:nvGrpSpPr>
+      <p:grpSpPr>
+        <a:xfrm>
+          <a:off x="0" y="0"/>
+          <a:ext cx="0" cy="0"/>
+          <a:chOff x="0" y="0"/>
+          <a:chExt cx="0" cy="0"/>
+        </a:xfrm>
+      </p:grpSpPr>
+      <p:sp>
+        <p:nvSpPr>
+          <p:cNvPr id="189" name="Google Shape;189;p3"/>
           <p:cNvSpPr txBox="1"/>
           <p:nvPr/>
         </p:nvSpPr>
@@ -14154,7 +14882,7 @@
       </p:sp>
       <p:sp>
         <p:nvSpPr>
-          <p:cNvPr id="178" name="Google Shape;178;p3"/>
+          <p:cNvPr id="190" name="Google Shape;190;p3"/>
           <p:cNvSpPr txBox="1"/>
           <p:nvPr/>
         </p:nvSpPr>
@@ -14386,11 +15114,8 @@
           <a:lstStyle/>
           <a:p>
             <a:pPr indent="0" lvl="0" marL="0" rtl="0" algn="l">
-              <a:lnSpc>
-                <a:spcPct val="115000"/>
-              </a:lnSpc>
-              <a:spcBef>
-                <a:spcPts val="1200"/>
+              <a:spcBef>
+                <a:spcPts val="400"/>
               </a:spcBef>
               <a:spcAft>
                 <a:spcPts val="0"/>
@@ -14409,7 +15134,366 @@
                 <a:cs typeface="Times New Roman"/>
                 <a:sym typeface="Times New Roman"/>
               </a:rPr>
-              <a:t>In the modern digital era, technology has become an integral part of students’ academic and personal lives, leading to a significant increase in daily screen usage. University students rely heavily on devices such as smartphones, laptops, and tablets for learning, communication, and entertainment. While technology offers numerous benefits, excessive screen time has emerged as a growing concern due to its potential impact on productivity and mental well-being. Prolonged exposure to screens can lead to issues such as reduced concentration, increased stress levels, and poor sleep quality. Therefore, it is essential to analyze and understand the relationship between screen time and its effects on students’ performance and psychological health using data-driven and machine learning approaches.</a:t>
+              <a:t>Technology has become an essential part of students’ academic and personal lives</a:t>
+            </a:r>
+            <a:endParaRPr sz="2000">
+              <a:latin typeface="Times New Roman"/>
+              <a:ea typeface="Times New Roman"/>
+              <a:cs typeface="Times New Roman"/>
+              <a:sym typeface="Times New Roman"/>
+            </a:endParaRPr>
+          </a:p>
+          <a:p>
+            <a:pPr indent="0" lvl="0" marL="0" rtl="0" algn="l">
+              <a:spcBef>
+                <a:spcPts val="400"/>
+              </a:spcBef>
+              <a:spcAft>
+                <a:spcPts val="0"/>
+              </a:spcAft>
+              <a:buClr>
+                <a:schemeClr val="dk1"/>
+              </a:buClr>
+              <a:buSzPts val="1100"/>
+              <a:buFont typeface="Arial"/>
+              <a:buNone/>
+            </a:pPr>
+            <a:r>
+              <a:rPr lang="en-US" sz="2000">
+                <a:latin typeface="Times New Roman"/>
+                <a:ea typeface="Times New Roman"/>
+                <a:cs typeface="Times New Roman"/>
+                <a:sym typeface="Times New Roman"/>
+              </a:rPr>
+              <a:t>Significant increase in daily screen usage among university students</a:t>
+            </a:r>
+            <a:endParaRPr sz="2000">
+              <a:latin typeface="Times New Roman"/>
+              <a:ea typeface="Times New Roman"/>
+              <a:cs typeface="Times New Roman"/>
+              <a:sym typeface="Times New Roman"/>
+            </a:endParaRPr>
+          </a:p>
+          <a:p>
+            <a:pPr indent="0" lvl="0" marL="0" rtl="0" algn="l">
+              <a:spcBef>
+                <a:spcPts val="400"/>
+              </a:spcBef>
+              <a:spcAft>
+                <a:spcPts val="0"/>
+              </a:spcAft>
+              <a:buClr>
+                <a:schemeClr val="dk1"/>
+              </a:buClr>
+              <a:buSzPts val="1100"/>
+              <a:buFont typeface="Arial"/>
+              <a:buNone/>
+            </a:pPr>
+            <a:r>
+              <a:rPr lang="en-US" sz="2000">
+                <a:latin typeface="Times New Roman"/>
+                <a:ea typeface="Times New Roman"/>
+                <a:cs typeface="Times New Roman"/>
+                <a:sym typeface="Times New Roman"/>
+              </a:rPr>
+              <a:t>Devices like smartphones, laptops, and tablets are widely used for:</a:t>
+            </a:r>
+            <a:endParaRPr sz="2000">
+              <a:latin typeface="Times New Roman"/>
+              <a:ea typeface="Times New Roman"/>
+              <a:cs typeface="Times New Roman"/>
+              <a:sym typeface="Times New Roman"/>
+            </a:endParaRPr>
+          </a:p>
+          <a:p>
+            <a:pPr indent="-298450" lvl="0" marL="457200" rtl="0" algn="l">
+              <a:lnSpc>
+                <a:spcPct val="115000"/>
+              </a:lnSpc>
+              <a:spcBef>
+                <a:spcPts val="1200"/>
+              </a:spcBef>
+              <a:spcAft>
+                <a:spcPts val="0"/>
+              </a:spcAft>
+              <a:buClr>
+                <a:schemeClr val="dk1"/>
+              </a:buClr>
+              <a:buSzPts val="1100"/>
+              <a:buChar char="●"/>
+            </a:pPr>
+            <a:r>
+              <a:rPr lang="en-US" sz="2000">
+                <a:latin typeface="Times New Roman"/>
+                <a:ea typeface="Times New Roman"/>
+                <a:cs typeface="Times New Roman"/>
+                <a:sym typeface="Times New Roman"/>
+              </a:rPr>
+              <a:t>Learning</a:t>
+            </a:r>
+            <a:endParaRPr sz="2000">
+              <a:latin typeface="Times New Roman"/>
+              <a:ea typeface="Times New Roman"/>
+              <a:cs typeface="Times New Roman"/>
+              <a:sym typeface="Times New Roman"/>
+            </a:endParaRPr>
+          </a:p>
+          <a:p>
+            <a:pPr indent="-298450" lvl="0" marL="457200" rtl="0" algn="l">
+              <a:lnSpc>
+                <a:spcPct val="115000"/>
+              </a:lnSpc>
+              <a:spcBef>
+                <a:spcPts val="0"/>
+              </a:spcBef>
+              <a:spcAft>
+                <a:spcPts val="0"/>
+              </a:spcAft>
+              <a:buClr>
+                <a:schemeClr val="dk1"/>
+              </a:buClr>
+              <a:buSzPts val="1100"/>
+              <a:buChar char="●"/>
+            </a:pPr>
+            <a:r>
+              <a:rPr lang="en-US" sz="2000">
+                <a:latin typeface="Times New Roman"/>
+                <a:ea typeface="Times New Roman"/>
+                <a:cs typeface="Times New Roman"/>
+                <a:sym typeface="Times New Roman"/>
+              </a:rPr>
+              <a:t>Communication</a:t>
+            </a:r>
+            <a:endParaRPr sz="2000">
+              <a:latin typeface="Times New Roman"/>
+              <a:ea typeface="Times New Roman"/>
+              <a:cs typeface="Times New Roman"/>
+              <a:sym typeface="Times New Roman"/>
+            </a:endParaRPr>
+          </a:p>
+          <a:p>
+            <a:pPr indent="-298450" lvl="0" marL="457200" rtl="0" algn="l">
+              <a:lnSpc>
+                <a:spcPct val="115000"/>
+              </a:lnSpc>
+              <a:spcBef>
+                <a:spcPts val="0"/>
+              </a:spcBef>
+              <a:spcAft>
+                <a:spcPts val="0"/>
+              </a:spcAft>
+              <a:buClr>
+                <a:schemeClr val="dk1"/>
+              </a:buClr>
+              <a:buSzPts val="1100"/>
+              <a:buChar char="●"/>
+            </a:pPr>
+            <a:r>
+              <a:rPr lang="en-US" sz="2000">
+                <a:latin typeface="Times New Roman"/>
+                <a:ea typeface="Times New Roman"/>
+                <a:cs typeface="Times New Roman"/>
+                <a:sym typeface="Times New Roman"/>
+              </a:rPr>
+              <a:t>Entertainment</a:t>
+            </a:r>
+            <a:endParaRPr sz="2000">
+              <a:latin typeface="Times New Roman"/>
+              <a:ea typeface="Times New Roman"/>
+              <a:cs typeface="Times New Roman"/>
+              <a:sym typeface="Times New Roman"/>
+            </a:endParaRPr>
+          </a:p>
+          <a:p>
+            <a:pPr indent="0" lvl="0" marL="0" rtl="0" algn="l">
+              <a:lnSpc>
+                <a:spcPct val="115000"/>
+              </a:lnSpc>
+              <a:spcBef>
+                <a:spcPts val="1200"/>
+              </a:spcBef>
+              <a:spcAft>
+                <a:spcPts val="0"/>
+              </a:spcAft>
+              <a:buClr>
+                <a:schemeClr val="dk1"/>
+              </a:buClr>
+              <a:buSzPts val="1100"/>
+              <a:buFont typeface="Arial"/>
+              <a:buNone/>
+            </a:pPr>
+            <a:r>
+              <a:rPr lang="en-US" sz="2000">
+                <a:latin typeface="Times New Roman"/>
+                <a:ea typeface="Times New Roman"/>
+                <a:cs typeface="Times New Roman"/>
+                <a:sym typeface="Times New Roman"/>
+              </a:rPr>
+              <a:t>While technology offers many benefits, excessive screen time is a growing concern</a:t>
+            </a:r>
+            <a:endParaRPr sz="2000">
+              <a:latin typeface="Times New Roman"/>
+              <a:ea typeface="Times New Roman"/>
+              <a:cs typeface="Times New Roman"/>
+              <a:sym typeface="Times New Roman"/>
+            </a:endParaRPr>
+          </a:p>
+          <a:p>
+            <a:pPr indent="0" lvl="0" marL="0" rtl="0" algn="l">
+              <a:spcBef>
+                <a:spcPts val="400"/>
+              </a:spcBef>
+              <a:spcAft>
+                <a:spcPts val="0"/>
+              </a:spcAft>
+              <a:buClr>
+                <a:schemeClr val="dk1"/>
+              </a:buClr>
+              <a:buSzPts val="1100"/>
+              <a:buFont typeface="Arial"/>
+              <a:buNone/>
+            </a:pPr>
+            <a:r>
+              <a:rPr lang="en-US" sz="2000">
+                <a:latin typeface="Times New Roman"/>
+                <a:ea typeface="Times New Roman"/>
+                <a:cs typeface="Times New Roman"/>
+                <a:sym typeface="Times New Roman"/>
+              </a:rPr>
+              <a:t>Negative effects of prolonged screen usage:</a:t>
+            </a:r>
+            <a:endParaRPr sz="2000">
+              <a:latin typeface="Times New Roman"/>
+              <a:ea typeface="Times New Roman"/>
+              <a:cs typeface="Times New Roman"/>
+              <a:sym typeface="Times New Roman"/>
+            </a:endParaRPr>
+          </a:p>
+          <a:p>
+            <a:pPr indent="-298450" lvl="0" marL="457200" rtl="0" algn="l">
+              <a:lnSpc>
+                <a:spcPct val="115000"/>
+              </a:lnSpc>
+              <a:spcBef>
+                <a:spcPts val="1200"/>
+              </a:spcBef>
+              <a:spcAft>
+                <a:spcPts val="0"/>
+              </a:spcAft>
+              <a:buClr>
+                <a:schemeClr val="dk1"/>
+              </a:buClr>
+              <a:buSzPts val="1100"/>
+              <a:buChar char="●"/>
+            </a:pPr>
+            <a:r>
+              <a:rPr lang="en-US" sz="2000">
+                <a:latin typeface="Times New Roman"/>
+                <a:ea typeface="Times New Roman"/>
+                <a:cs typeface="Times New Roman"/>
+                <a:sym typeface="Times New Roman"/>
+              </a:rPr>
+              <a:t>Reduced concentration</a:t>
+            </a:r>
+            <a:endParaRPr sz="2000">
+              <a:latin typeface="Times New Roman"/>
+              <a:ea typeface="Times New Roman"/>
+              <a:cs typeface="Times New Roman"/>
+              <a:sym typeface="Times New Roman"/>
+            </a:endParaRPr>
+          </a:p>
+          <a:p>
+            <a:pPr indent="-298450" lvl="0" marL="457200" rtl="0" algn="l">
+              <a:lnSpc>
+                <a:spcPct val="115000"/>
+              </a:lnSpc>
+              <a:spcBef>
+                <a:spcPts val="0"/>
+              </a:spcBef>
+              <a:spcAft>
+                <a:spcPts val="0"/>
+              </a:spcAft>
+              <a:buClr>
+                <a:schemeClr val="dk1"/>
+              </a:buClr>
+              <a:buSzPts val="1100"/>
+              <a:buChar char="●"/>
+            </a:pPr>
+            <a:r>
+              <a:rPr lang="en-US" sz="2000">
+                <a:latin typeface="Times New Roman"/>
+                <a:ea typeface="Times New Roman"/>
+                <a:cs typeface="Times New Roman"/>
+                <a:sym typeface="Times New Roman"/>
+              </a:rPr>
+              <a:t>Increased stress levels</a:t>
+            </a:r>
+            <a:endParaRPr sz="2000">
+              <a:latin typeface="Times New Roman"/>
+              <a:ea typeface="Times New Roman"/>
+              <a:cs typeface="Times New Roman"/>
+              <a:sym typeface="Times New Roman"/>
+            </a:endParaRPr>
+          </a:p>
+          <a:p>
+            <a:pPr indent="-298450" lvl="0" marL="457200" rtl="0" algn="l">
+              <a:lnSpc>
+                <a:spcPct val="115000"/>
+              </a:lnSpc>
+              <a:spcBef>
+                <a:spcPts val="0"/>
+              </a:spcBef>
+              <a:spcAft>
+                <a:spcPts val="0"/>
+              </a:spcAft>
+              <a:buClr>
+                <a:schemeClr val="dk1"/>
+              </a:buClr>
+              <a:buSzPts val="1100"/>
+              <a:buChar char="●"/>
+            </a:pPr>
+            <a:r>
+              <a:rPr lang="en-US" sz="2000">
+                <a:latin typeface="Times New Roman"/>
+                <a:ea typeface="Times New Roman"/>
+                <a:cs typeface="Times New Roman"/>
+                <a:sym typeface="Times New Roman"/>
+              </a:rPr>
+              <a:t>Poor sleep quality</a:t>
+            </a:r>
+            <a:endParaRPr sz="2000">
+              <a:latin typeface="Times New Roman"/>
+              <a:ea typeface="Times New Roman"/>
+              <a:cs typeface="Times New Roman"/>
+              <a:sym typeface="Times New Roman"/>
+            </a:endParaRPr>
+          </a:p>
+          <a:p>
+            <a:pPr indent="0" lvl="0" marL="0" rtl="0" algn="l">
+              <a:lnSpc>
+                <a:spcPct val="115000"/>
+              </a:lnSpc>
+              <a:spcBef>
+                <a:spcPts val="1200"/>
+              </a:spcBef>
+              <a:spcAft>
+                <a:spcPts val="0"/>
+              </a:spcAft>
+              <a:buClr>
+                <a:schemeClr val="dk1"/>
+              </a:buClr>
+              <a:buSzPts val="1100"/>
+              <a:buFont typeface="Arial"/>
+              <a:buNone/>
+            </a:pPr>
+            <a:r>
+              <a:rPr lang="en-US" sz="2000">
+                <a:latin typeface="Times New Roman"/>
+                <a:ea typeface="Times New Roman"/>
+                <a:cs typeface="Times New Roman"/>
+                <a:sym typeface="Times New Roman"/>
+              </a:rPr>
+              <a:t>Need for a data-driven and machine learning approach to analyze its impact</a:t>
             </a:r>
             <a:endParaRPr sz="2000">
               <a:latin typeface="Times New Roman"/>
@@ -14424,7 +15508,7 @@
                 <a:spcPct val="100000"/>
               </a:lnSpc>
               <a:spcBef>
-                <a:spcPts val="1200"/>
+                <a:spcPts val="400"/>
               </a:spcBef>
               <a:spcAft>
                 <a:spcPts val="0"/>
@@ -14553,10 +15637,20 @@
               <a:buNone/>
             </a:pPr>
             <a:r>
-              <a:rPr lang="en-US" sz="2000"/>
+              <a:rPr lang="en-US" sz="2000">
+                <a:latin typeface="Times New Roman"/>
+                <a:ea typeface="Times New Roman"/>
+                <a:cs typeface="Times New Roman"/>
+                <a:sym typeface="Times New Roman"/>
+              </a:rPr>
               <a:t>With the increasing use of digital devices, university students are spending more time on screens for both academic and personal activities. While technology is beneficial, excessive screen time has raised concerns regarding its impact on productivity and mental well-being. However, there is limited data-driven analysis to clearly understand these effects.</a:t>
             </a:r>
-            <a:endParaRPr sz="2000"/>
+            <a:endParaRPr sz="2000">
+              <a:latin typeface="Times New Roman"/>
+              <a:ea typeface="Times New Roman"/>
+              <a:cs typeface="Times New Roman"/>
+              <a:sym typeface="Times New Roman"/>
+            </a:endParaRPr>
           </a:p>
           <a:p>
             <a:pPr indent="0" lvl="0" marL="0" rtl="0" algn="l">
@@ -14572,10 +15666,20 @@
               <a:buNone/>
             </a:pPr>
             <a:r>
-              <a:rPr b="1" lang="en-US" sz="2000"/>
+              <a:rPr b="1" lang="en-US" sz="2000">
+                <a:latin typeface="Times New Roman"/>
+                <a:ea typeface="Times New Roman"/>
+                <a:cs typeface="Times New Roman"/>
+                <a:sym typeface="Times New Roman"/>
+              </a:rPr>
               <a:t>Key Issues:</a:t>
             </a:r>
-            <a:endParaRPr b="1" sz="2000"/>
+            <a:endParaRPr b="1" sz="2000">
+              <a:latin typeface="Times New Roman"/>
+              <a:ea typeface="Times New Roman"/>
+              <a:cs typeface="Times New Roman"/>
+              <a:sym typeface="Times New Roman"/>
+            </a:endParaRPr>
           </a:p>
           <a:p>
             <a:pPr indent="-355600" lvl="0" marL="457200" rtl="0" algn="l">
@@ -14589,13 +15693,24 @@
                 <a:spcPts val="0"/>
               </a:spcAft>
               <a:buSzPts val="2000"/>
+              <a:buFont typeface="Times New Roman"/>
               <a:buChar char="●"/>
             </a:pPr>
             <a:r>
-              <a:rPr lang="en-US" sz="2000"/>
+              <a:rPr lang="en-US" sz="2000">
+                <a:latin typeface="Times New Roman"/>
+                <a:ea typeface="Times New Roman"/>
+                <a:cs typeface="Times New Roman"/>
+                <a:sym typeface="Times New Roman"/>
+              </a:rPr>
               <a:t>Increased screen time</a:t>
             </a:r>
-            <a:endParaRPr sz="2000"/>
+            <a:endParaRPr sz="2000">
+              <a:latin typeface="Times New Roman"/>
+              <a:ea typeface="Times New Roman"/>
+              <a:cs typeface="Times New Roman"/>
+              <a:sym typeface="Times New Roman"/>
+            </a:endParaRPr>
           </a:p>
           <a:p>
             <a:pPr indent="-355600" lvl="0" marL="457200" rtl="0" algn="l">
@@ -14609,13 +15724,24 @@
                 <a:spcPts val="0"/>
               </a:spcAft>
               <a:buSzPts val="2000"/>
+              <a:buFont typeface="Times New Roman"/>
               <a:buChar char="●"/>
             </a:pPr>
             <a:r>
-              <a:rPr lang="en-US" sz="2000"/>
+              <a:rPr lang="en-US" sz="2000">
+                <a:latin typeface="Times New Roman"/>
+                <a:ea typeface="Times New Roman"/>
+                <a:cs typeface="Times New Roman"/>
+                <a:sym typeface="Times New Roman"/>
+              </a:rPr>
               <a:t>Reduced productivity and focus</a:t>
             </a:r>
-            <a:endParaRPr sz="2000"/>
+            <a:endParaRPr sz="2000">
+              <a:latin typeface="Times New Roman"/>
+              <a:ea typeface="Times New Roman"/>
+              <a:cs typeface="Times New Roman"/>
+              <a:sym typeface="Times New Roman"/>
+            </a:endParaRPr>
           </a:p>
           <a:p>
             <a:pPr indent="-355600" lvl="0" marL="457200" rtl="0" algn="l">
@@ -14629,13 +15755,24 @@
                 <a:spcPts val="0"/>
               </a:spcAft>
               <a:buSzPts val="2000"/>
+              <a:buFont typeface="Times New Roman"/>
               <a:buChar char="●"/>
             </a:pPr>
             <a:r>
-              <a:rPr lang="en-US" sz="2000"/>
+              <a:rPr lang="en-US" sz="2000">
+                <a:latin typeface="Times New Roman"/>
+                <a:ea typeface="Times New Roman"/>
+                <a:cs typeface="Times New Roman"/>
+                <a:sym typeface="Times New Roman"/>
+              </a:rPr>
               <a:t>Higher stress levels</a:t>
             </a:r>
-            <a:endParaRPr sz="2000"/>
+            <a:endParaRPr sz="2000">
+              <a:latin typeface="Times New Roman"/>
+              <a:ea typeface="Times New Roman"/>
+              <a:cs typeface="Times New Roman"/>
+              <a:sym typeface="Times New Roman"/>
+            </a:endParaRPr>
           </a:p>
           <a:p>
             <a:pPr indent="-355600" lvl="0" marL="457200" rtl="0" algn="l">
@@ -14649,13 +15786,24 @@
                 <a:spcPts val="0"/>
               </a:spcAft>
               <a:buSzPts val="2000"/>
+              <a:buFont typeface="Times New Roman"/>
               <a:buChar char="●"/>
             </a:pPr>
             <a:r>
-              <a:rPr lang="en-US" sz="2000"/>
+              <a:rPr lang="en-US" sz="2000">
+                <a:latin typeface="Times New Roman"/>
+                <a:ea typeface="Times New Roman"/>
+                <a:cs typeface="Times New Roman"/>
+                <a:sym typeface="Times New Roman"/>
+              </a:rPr>
               <a:t>Poor sleep quality</a:t>
             </a:r>
-            <a:endParaRPr sz="2000"/>
+            <a:endParaRPr sz="2000">
+              <a:latin typeface="Times New Roman"/>
+              <a:ea typeface="Times New Roman"/>
+              <a:cs typeface="Times New Roman"/>
+              <a:sym typeface="Times New Roman"/>
+            </a:endParaRPr>
           </a:p>
           <a:p>
             <a:pPr indent="0" lvl="0" marL="0" rtl="0" algn="l">
@@ -14671,21 +15819,46 @@
               <a:buNone/>
             </a:pPr>
             <a:r>
-              <a:rPr lang="en-US" sz="2000"/>
+              <a:rPr lang="en-US" sz="2000">
+                <a:latin typeface="Times New Roman"/>
+                <a:ea typeface="Times New Roman"/>
+                <a:cs typeface="Times New Roman"/>
+                <a:sym typeface="Times New Roman"/>
+              </a:rPr>
               <a:t> </a:t>
             </a:r>
             <a:r>
-              <a:rPr b="1" lang="en-US" sz="2000"/>
+              <a:rPr b="1" lang="en-US" sz="2000">
+                <a:latin typeface="Times New Roman"/>
+                <a:ea typeface="Times New Roman"/>
+                <a:cs typeface="Times New Roman"/>
+                <a:sym typeface="Times New Roman"/>
+              </a:rPr>
               <a:t>Core Problem:</a:t>
             </a:r>
             <a:br>
-              <a:rPr b="1" lang="en-US" sz="2000"/>
+              <a:rPr b="1" lang="en-US" sz="2000">
+                <a:latin typeface="Times New Roman"/>
+                <a:ea typeface="Times New Roman"/>
+                <a:cs typeface="Times New Roman"/>
+                <a:sym typeface="Times New Roman"/>
+              </a:rPr>
             </a:br>
             <a:r>
-              <a:rPr lang="en-US" sz="2000"/>
+              <a:rPr lang="en-US" sz="2000">
+                <a:latin typeface="Times New Roman"/>
+                <a:ea typeface="Times New Roman"/>
+                <a:cs typeface="Times New Roman"/>
+                <a:sym typeface="Times New Roman"/>
+              </a:rPr>
               <a:t> To analyze the impact of screen time on productivity, stress, and sleep quality using a data-driven approach.</a:t>
             </a:r>
-            <a:endParaRPr sz="2000"/>
+            <a:endParaRPr sz="2000">
+              <a:latin typeface="Times New Roman"/>
+              <a:ea typeface="Times New Roman"/>
+              <a:cs typeface="Times New Roman"/>
+              <a:sym typeface="Times New Roman"/>
+            </a:endParaRPr>
           </a:p>
           <a:p>
             <a:pPr indent="0" lvl="0" marL="0" rtl="0" algn="l">
@@ -14700,7 +15873,12 @@
             <a:r>
               <a:t/>
             </a:r>
-            <a:endParaRPr sz="2000"/>
+            <a:endParaRPr sz="2000">
+              <a:latin typeface="Times New Roman"/>
+              <a:ea typeface="Times New Roman"/>
+              <a:cs typeface="Times New Roman"/>
+              <a:sym typeface="Times New Roman"/>
+            </a:endParaRPr>
           </a:p>
         </p:txBody>
       </p:sp>
@@ -15079,11 +16257,8 @@
           <a:lstStyle/>
           <a:p>
             <a:pPr indent="0" lvl="0" marL="0" rtl="0" algn="l">
-              <a:lnSpc>
-                <a:spcPct val="115000"/>
-              </a:lnSpc>
-              <a:spcBef>
-                <a:spcPts val="1200"/>
+              <a:spcBef>
+                <a:spcPts val="1000"/>
               </a:spcBef>
               <a:spcAft>
                 <a:spcPts val="0"/>
@@ -15102,162 +16277,7 @@
                 <a:cs typeface="Times New Roman"/>
                 <a:sym typeface="Times New Roman"/>
               </a:rPr>
-              <a:t>Several studies have examined the impact of screen time on students’ behavior and mental health.</a:t>
-            </a:r>
-            <a:endParaRPr sz="2000">
-              <a:latin typeface="Times New Roman"/>
-              <a:ea typeface="Times New Roman"/>
-              <a:cs typeface="Times New Roman"/>
-              <a:sym typeface="Times New Roman"/>
-            </a:endParaRPr>
-          </a:p>
-          <a:p>
-            <a:pPr indent="-355600" lvl="0" marL="457200" rtl="0" algn="l">
-              <a:lnSpc>
-                <a:spcPct val="115000"/>
-              </a:lnSpc>
-              <a:spcBef>
-                <a:spcPts val="1200"/>
-              </a:spcBef>
-              <a:spcAft>
-                <a:spcPts val="0"/>
-              </a:spcAft>
-              <a:buSzPts val="2000"/>
-              <a:buFont typeface="Times New Roman"/>
-              <a:buChar char="●"/>
-            </a:pPr>
-            <a:r>
-              <a:rPr lang="en-US" sz="2000">
-                <a:latin typeface="Times New Roman"/>
-                <a:ea typeface="Times New Roman"/>
-                <a:cs typeface="Times New Roman"/>
-                <a:sym typeface="Times New Roman"/>
-              </a:rPr>
-              <a:t>Increased screen usage is linked to higher anxiety and depression levels</a:t>
-            </a:r>
-            <a:endParaRPr sz="2000">
-              <a:latin typeface="Times New Roman"/>
-              <a:ea typeface="Times New Roman"/>
-              <a:cs typeface="Times New Roman"/>
-              <a:sym typeface="Times New Roman"/>
-            </a:endParaRPr>
-          </a:p>
-          <a:p>
-            <a:pPr indent="-355600" lvl="0" marL="457200" rtl="0" algn="l">
-              <a:lnSpc>
-                <a:spcPct val="115000"/>
-              </a:lnSpc>
-              <a:spcBef>
-                <a:spcPts val="0"/>
-              </a:spcBef>
-              <a:spcAft>
-                <a:spcPts val="0"/>
-              </a:spcAft>
-              <a:buSzPts val="2000"/>
-              <a:buFont typeface="Times New Roman"/>
-              <a:buChar char="●"/>
-            </a:pPr>
-            <a:r>
-              <a:rPr lang="en-US" sz="2000">
-                <a:latin typeface="Times New Roman"/>
-                <a:ea typeface="Times New Roman"/>
-                <a:cs typeface="Times New Roman"/>
-                <a:sym typeface="Times New Roman"/>
-              </a:rPr>
-              <a:t>Excessive mobile phone use negatively affects academic performance</a:t>
-            </a:r>
-            <a:endParaRPr sz="2000">
-              <a:latin typeface="Times New Roman"/>
-              <a:ea typeface="Times New Roman"/>
-              <a:cs typeface="Times New Roman"/>
-              <a:sym typeface="Times New Roman"/>
-            </a:endParaRPr>
-          </a:p>
-          <a:p>
-            <a:pPr indent="-355600" lvl="0" marL="457200" rtl="0" algn="l">
-              <a:lnSpc>
-                <a:spcPct val="115000"/>
-              </a:lnSpc>
-              <a:spcBef>
-                <a:spcPts val="0"/>
-              </a:spcBef>
-              <a:spcAft>
-                <a:spcPts val="0"/>
-              </a:spcAft>
-              <a:buSzPts val="2000"/>
-              <a:buFont typeface="Times New Roman"/>
-              <a:buChar char="●"/>
-            </a:pPr>
-            <a:r>
-              <a:rPr lang="en-US" sz="2000">
-                <a:latin typeface="Times New Roman"/>
-                <a:ea typeface="Times New Roman"/>
-                <a:cs typeface="Times New Roman"/>
-                <a:sym typeface="Times New Roman"/>
-              </a:rPr>
-              <a:t>Screen exposure, especially before sleep, disrupts sleep patterns</a:t>
-            </a:r>
-            <a:endParaRPr sz="2000">
-              <a:latin typeface="Times New Roman"/>
-              <a:ea typeface="Times New Roman"/>
-              <a:cs typeface="Times New Roman"/>
-              <a:sym typeface="Times New Roman"/>
-            </a:endParaRPr>
-          </a:p>
-          <a:p>
-            <a:pPr indent="-355600" lvl="0" marL="457200" rtl="0" algn="l">
-              <a:lnSpc>
-                <a:spcPct val="115000"/>
-              </a:lnSpc>
-              <a:spcBef>
-                <a:spcPts val="0"/>
-              </a:spcBef>
-              <a:spcAft>
-                <a:spcPts val="0"/>
-              </a:spcAft>
-              <a:buSzPts val="2000"/>
-              <a:buFont typeface="Times New Roman"/>
-              <a:buChar char="●"/>
-            </a:pPr>
-            <a:r>
-              <a:rPr lang="en-US" sz="2000">
-                <a:latin typeface="Times New Roman"/>
-                <a:ea typeface="Times New Roman"/>
-                <a:cs typeface="Times New Roman"/>
-                <a:sym typeface="Times New Roman"/>
-              </a:rPr>
-              <a:t>Media multitasking reduces attention and cognitive control</a:t>
-            </a:r>
-            <a:endParaRPr sz="2000">
-              <a:latin typeface="Times New Roman"/>
-              <a:ea typeface="Times New Roman"/>
-              <a:cs typeface="Times New Roman"/>
-              <a:sym typeface="Times New Roman"/>
-            </a:endParaRPr>
-          </a:p>
-          <a:p>
-            <a:pPr indent="-355600" lvl="0" marL="457200" rtl="0" algn="l">
-              <a:lnSpc>
-                <a:spcPct val="115000"/>
-              </a:lnSpc>
-              <a:spcBef>
-                <a:spcPts val="0"/>
-              </a:spcBef>
-              <a:spcAft>
-                <a:spcPts val="0"/>
-              </a:spcAft>
-              <a:buSzPts val="2000"/>
-              <a:buFont typeface="Times New Roman"/>
-              <a:buChar char="●"/>
-            </a:pPr>
-            <a:r>
-              <a:rPr lang="en-US" sz="2000">
-                <a:latin typeface="Times New Roman"/>
-                <a:ea typeface="Times New Roman"/>
-                <a:cs typeface="Times New Roman"/>
-                <a:sym typeface="Times New Roman"/>
-              </a:rPr>
-              <a:t>Moderate screen use may not be harmful, but excessive use causes significant psychological effects</a:t>
+              <a:t>Several studies highlight the significant impact of screen time on students’ mental health and academic performance</a:t>
             </a:r>
             <a:endParaRPr sz="2000">
               <a:latin typeface="Times New Roman"/>
@@ -15268,11 +16288,8 @@
           </a:p>
           <a:p>
             <a:pPr indent="0" lvl="0" marL="0" rtl="0" algn="l">
-              <a:lnSpc>
-                <a:spcPct val="115000"/>
-              </a:lnSpc>
-              <a:spcBef>
-                <a:spcPts val="1200"/>
+              <a:spcBef>
+                <a:spcPts val="1000"/>
               </a:spcBef>
               <a:spcAft>
                 <a:spcPts val="0"/>
@@ -15291,7 +16308,7 @@
                 <a:cs typeface="Times New Roman"/>
                 <a:sym typeface="Times New Roman"/>
               </a:rPr>
-              <a:t>However, most studies rely on traditional statistical methods, with limited use of machine learning for predictive analysis.</a:t>
+              <a:t>Increased screen usage is consistently associated with higher stress levels, reduced concentration, and decreased academic efficiency</a:t>
             </a:r>
             <a:endParaRPr sz="2000">
               <a:latin typeface="Times New Roman"/>
@@ -15303,7 +16320,224 @@
           <a:p>
             <a:pPr indent="0" lvl="0" marL="0" rtl="0" algn="l">
               <a:spcBef>
+                <a:spcPts val="1000"/>
+              </a:spcBef>
+              <a:spcAft>
+                <a:spcPts val="0"/>
+              </a:spcAft>
+              <a:buClr>
+                <a:schemeClr val="dk1"/>
+              </a:buClr>
+              <a:buSzPts val="1100"/>
+              <a:buFont typeface="Arial"/>
+              <a:buNone/>
+            </a:pPr>
+            <a:r>
+              <a:rPr lang="en-US" sz="2000">
+                <a:latin typeface="Times New Roman"/>
+                <a:ea typeface="Times New Roman"/>
+                <a:cs typeface="Times New Roman"/>
+                <a:sym typeface="Times New Roman"/>
+              </a:rPr>
+              <a:t>Excessive screen exposure, especially for non-academic purposes, leads to:</a:t>
+            </a:r>
+            <a:endParaRPr sz="2000">
+              <a:latin typeface="Times New Roman"/>
+              <a:ea typeface="Times New Roman"/>
+              <a:cs typeface="Times New Roman"/>
+              <a:sym typeface="Times New Roman"/>
+            </a:endParaRPr>
+          </a:p>
+          <a:p>
+            <a:pPr indent="-298450" lvl="0" marL="457200" rtl="0" algn="l">
+              <a:lnSpc>
+                <a:spcPct val="115000"/>
+              </a:lnSpc>
+              <a:spcBef>
                 <a:spcPts val="1200"/>
+              </a:spcBef>
+              <a:spcAft>
+                <a:spcPts val="0"/>
+              </a:spcAft>
+              <a:buSzPts val="1100"/>
+              <a:buChar char="●"/>
+            </a:pPr>
+            <a:r>
+              <a:rPr lang="en-US" sz="2000">
+                <a:latin typeface="Times New Roman"/>
+                <a:ea typeface="Times New Roman"/>
+                <a:cs typeface="Times New Roman"/>
+                <a:sym typeface="Times New Roman"/>
+              </a:rPr>
+              <a:t>Poor sleep quality</a:t>
+            </a:r>
+            <a:endParaRPr sz="2000">
+              <a:latin typeface="Times New Roman"/>
+              <a:ea typeface="Times New Roman"/>
+              <a:cs typeface="Times New Roman"/>
+              <a:sym typeface="Times New Roman"/>
+            </a:endParaRPr>
+          </a:p>
+          <a:p>
+            <a:pPr indent="-298450" lvl="0" marL="457200" rtl="0" algn="l">
+              <a:lnSpc>
+                <a:spcPct val="115000"/>
+              </a:lnSpc>
+              <a:spcBef>
+                <a:spcPts val="0"/>
+              </a:spcBef>
+              <a:spcAft>
+                <a:spcPts val="0"/>
+              </a:spcAft>
+              <a:buSzPts val="1100"/>
+              <a:buChar char="●"/>
+            </a:pPr>
+            <a:r>
+              <a:rPr lang="en-US" sz="2000">
+                <a:latin typeface="Times New Roman"/>
+                <a:ea typeface="Times New Roman"/>
+                <a:cs typeface="Times New Roman"/>
+                <a:sym typeface="Times New Roman"/>
+              </a:rPr>
+              <a:t>Increased mental fatigue</a:t>
+            </a:r>
+            <a:endParaRPr sz="2000">
+              <a:latin typeface="Times New Roman"/>
+              <a:ea typeface="Times New Roman"/>
+              <a:cs typeface="Times New Roman"/>
+              <a:sym typeface="Times New Roman"/>
+            </a:endParaRPr>
+          </a:p>
+          <a:p>
+            <a:pPr indent="-298450" lvl="0" marL="457200" rtl="0" algn="l">
+              <a:lnSpc>
+                <a:spcPct val="115000"/>
+              </a:lnSpc>
+              <a:spcBef>
+                <a:spcPts val="0"/>
+              </a:spcBef>
+              <a:spcAft>
+                <a:spcPts val="0"/>
+              </a:spcAft>
+              <a:buSzPts val="1100"/>
+              <a:buChar char="●"/>
+            </a:pPr>
+            <a:r>
+              <a:rPr lang="en-US" sz="2000">
+                <a:latin typeface="Times New Roman"/>
+                <a:ea typeface="Times New Roman"/>
+                <a:cs typeface="Times New Roman"/>
+                <a:sym typeface="Times New Roman"/>
+              </a:rPr>
+              <a:t>Lower productivity levels</a:t>
+            </a:r>
+            <a:endParaRPr sz="2000">
+              <a:latin typeface="Times New Roman"/>
+              <a:ea typeface="Times New Roman"/>
+              <a:cs typeface="Times New Roman"/>
+              <a:sym typeface="Times New Roman"/>
+            </a:endParaRPr>
+          </a:p>
+          <a:p>
+            <a:pPr indent="0" lvl="0" marL="0" rtl="0" algn="l">
+              <a:lnSpc>
+                <a:spcPct val="115000"/>
+              </a:lnSpc>
+              <a:spcBef>
+                <a:spcPts val="1200"/>
+              </a:spcBef>
+              <a:spcAft>
+                <a:spcPts val="0"/>
+              </a:spcAft>
+              <a:buClr>
+                <a:schemeClr val="dk1"/>
+              </a:buClr>
+              <a:buSzPts val="1100"/>
+              <a:buFont typeface="Arial"/>
+              <a:buNone/>
+            </a:pPr>
+            <a:r>
+              <a:rPr lang="en-US" sz="2000">
+                <a:latin typeface="Times New Roman"/>
+                <a:ea typeface="Times New Roman"/>
+                <a:cs typeface="Times New Roman"/>
+                <a:sym typeface="Times New Roman"/>
+              </a:rPr>
+              <a:t>Many studies also indicate that media multitasking and prolonged device usage negatively affect attention span and cognitive control</a:t>
+            </a:r>
+            <a:endParaRPr sz="2000">
+              <a:latin typeface="Times New Roman"/>
+              <a:ea typeface="Times New Roman"/>
+              <a:cs typeface="Times New Roman"/>
+              <a:sym typeface="Times New Roman"/>
+            </a:endParaRPr>
+          </a:p>
+          <a:p>
+            <a:pPr indent="0" lvl="0" marL="0" rtl="0" algn="l">
+              <a:spcBef>
+                <a:spcPts val="1000"/>
+              </a:spcBef>
+              <a:spcAft>
+                <a:spcPts val="0"/>
+              </a:spcAft>
+              <a:buClr>
+                <a:schemeClr val="dk1"/>
+              </a:buClr>
+              <a:buSzPts val="1100"/>
+              <a:buFont typeface="Arial"/>
+              <a:buNone/>
+            </a:pPr>
+            <a:r>
+              <a:rPr lang="en-US" sz="2000">
+                <a:latin typeface="Times New Roman"/>
+                <a:ea typeface="Times New Roman"/>
+                <a:cs typeface="Times New Roman"/>
+                <a:sym typeface="Times New Roman"/>
+              </a:rPr>
+              <a:t>While moderate screen usage can support learning and communication, excessive use results in adverse psychological and behavioral effects</a:t>
+            </a:r>
+            <a:endParaRPr sz="2000">
+              <a:latin typeface="Times New Roman"/>
+              <a:ea typeface="Times New Roman"/>
+              <a:cs typeface="Times New Roman"/>
+              <a:sym typeface="Times New Roman"/>
+            </a:endParaRPr>
+          </a:p>
+          <a:p>
+            <a:pPr indent="0" lvl="0" marL="0" rtl="0" algn="l">
+              <a:spcBef>
+                <a:spcPts val="1000"/>
+              </a:spcBef>
+              <a:spcAft>
+                <a:spcPts val="0"/>
+              </a:spcAft>
+              <a:buClr>
+                <a:schemeClr val="dk1"/>
+              </a:buClr>
+              <a:buSzPts val="1100"/>
+              <a:buFont typeface="Arial"/>
+              <a:buNone/>
+            </a:pPr>
+            <a:r>
+              <a:rPr lang="en-US" sz="2000">
+                <a:latin typeface="Times New Roman"/>
+                <a:ea typeface="Times New Roman"/>
+                <a:cs typeface="Times New Roman"/>
+                <a:sym typeface="Times New Roman"/>
+              </a:rPr>
+              <a:t>However, most existing research relies on traditional statistical methods, with limited use of machine learning techniques for predictive and data-driven analysis</a:t>
+            </a:r>
+            <a:endParaRPr sz="2000">
+              <a:latin typeface="Times New Roman"/>
+              <a:ea typeface="Times New Roman"/>
+              <a:cs typeface="Times New Roman"/>
+              <a:sym typeface="Times New Roman"/>
+            </a:endParaRPr>
+          </a:p>
+          <a:p>
+            <a:pPr indent="0" lvl="0" marL="0" rtl="0" algn="l">
+              <a:spcBef>
+                <a:spcPts val="1000"/>
               </a:spcBef>
               <a:spcAft>
                 <a:spcPts val="0"/>
@@ -15347,9 +16581,90 @@
           <a:chExt cx="0" cy="0"/>
         </a:xfrm>
       </p:grpSpPr>
+      <p:pic>
+        <p:nvPicPr>
+          <p:cNvPr id="118" name="Google Shape;118;g3dae72e459a_0_18" title="ChatGPT Image Apr 30, 2026, 03_16_38 PM.png"/>
+          <p:cNvPicPr preferRelativeResize="0"/>
+          <p:nvPr/>
+        </p:nvPicPr>
+        <p:blipFill>
+          <a:blip r:embed="rId3">
+            <a:alphaModFix/>
+          </a:blip>
+          <a:stretch>
+            <a:fillRect/>
+          </a:stretch>
+        </p:blipFill>
+        <p:spPr>
+          <a:xfrm>
+            <a:off x="250075" y="1702750"/>
+            <a:ext cx="5544150" cy="3696100"/>
+          </a:xfrm>
+          <a:prstGeom prst="rect">
+            <a:avLst/>
+          </a:prstGeom>
+          <a:noFill/>
+          <a:ln>
+            <a:noFill/>
+          </a:ln>
+        </p:spPr>
+      </p:pic>
+      <p:pic>
+        <p:nvPicPr>
+          <p:cNvPr id="119" name="Google Shape;119;g3dae72e459a_0_18" title="ChatGPT Image Apr 30, 2026, 03_16_44 PM.png"/>
+          <p:cNvPicPr preferRelativeResize="0"/>
+          <p:nvPr/>
+        </p:nvPicPr>
+        <p:blipFill>
+          <a:blip r:embed="rId4">
+            <a:alphaModFix/>
+          </a:blip>
+          <a:stretch>
+            <a:fillRect/>
+          </a:stretch>
+        </p:blipFill>
+        <p:spPr>
+          <a:xfrm>
+            <a:off x="5903675" y="2535800"/>
+            <a:ext cx="3044974" cy="2029983"/>
+          </a:xfrm>
+          <a:prstGeom prst="rect">
+            <a:avLst/>
+          </a:prstGeom>
+          <a:noFill/>
+          <a:ln>
+            <a:noFill/>
+          </a:ln>
+        </p:spPr>
+      </p:pic>
+    </p:spTree>
+  </p:cSld>
+  <p:clrMapOvr>
+    <a:masterClrMapping/>
+  </p:clrMapOvr>
+</p:sld>
+</file>
+
+<file path=ppt/slides/slide7.xml><?xml version="1.0" encoding="utf-8"?>
+<p:sld xmlns:a="http://schemas.openxmlformats.org/drawingml/2006/main" xmlns:r="http://schemas.openxmlformats.org/officeDocument/2006/relationships" xmlns:mc="http://schemas.openxmlformats.org/markup-compatibility/2006" xmlns:mv="urn:schemas-microsoft-com:mac:vml" xmlns:p="http://schemas.openxmlformats.org/presentationml/2006/main" xmlns:c="http://schemas.openxmlformats.org/drawingml/2006/chart" xmlns:dgm="http://schemas.openxmlformats.org/drawingml/2006/diagram" xmlns:o="urn:schemas-microsoft-com:office:office" xmlns:v="urn:schemas-microsoft-com:vml" xmlns:pvml="urn:schemas-microsoft-com:office:powerpoint" xmlns:com="http://schemas.openxmlformats.org/drawingml/2006/compatibility" xmlns:p14="http://schemas.microsoft.com/office/powerpoint/2010/main" xmlns:p15="http://schemas.microsoft.com/office/powerpoint/2012/main" xmlns:ahyp="http://schemas.microsoft.com/office/drawing/2018/hyperlinkcolor">
+  <p:cSld>
+    <p:spTree>
+      <p:nvGrpSpPr>
+        <p:cNvPr id="124" name="Shape 124"/>
+        <p:cNvGrpSpPr/>
+        <p:nvPr/>
+      </p:nvGrpSpPr>
+      <p:grpSpPr>
+        <a:xfrm>
+          <a:off x="0" y="0"/>
+          <a:ext cx="0" cy="0"/>
+          <a:chOff x="0" y="0"/>
+          <a:chExt cx="0" cy="0"/>
+        </a:xfrm>
+      </p:grpSpPr>
       <p:sp>
         <p:nvSpPr>
-          <p:cNvPr id="118" name="Google Shape;118;g3e6813604e6_1_37"/>
+          <p:cNvPr id="125" name="Google Shape;125;g3e6813604e6_1_37"/>
           <p:cNvSpPr txBox="1"/>
           <p:nvPr>
             <p:ph type="title"/>
@@ -15399,7 +16714,7 @@
       </p:sp>
       <p:sp>
         <p:nvSpPr>
-          <p:cNvPr id="119" name="Google Shape;119;g3e6813604e6_1_37"/>
+          <p:cNvPr id="126" name="Google Shape;126;g3e6813604e6_1_37"/>
           <p:cNvSpPr txBox="1"/>
           <p:nvPr>
             <p:ph idx="1" type="body"/>
@@ -15780,449 +17095,6 @@
                 <a:sym typeface="Times New Roman"/>
               </a:rPr>
               <a:t> to predict productivity based on screen time</a:t>
-            </a:r>
-            <a:endParaRPr sz="2000">
-              <a:latin typeface="Times New Roman"/>
-              <a:ea typeface="Times New Roman"/>
-              <a:cs typeface="Times New Roman"/>
-              <a:sym typeface="Times New Roman"/>
-            </a:endParaRPr>
-          </a:p>
-          <a:p>
-            <a:pPr indent="0" lvl="0" marL="0" rtl="0" algn="l">
-              <a:spcBef>
-                <a:spcPts val="1200"/>
-              </a:spcBef>
-              <a:spcAft>
-                <a:spcPts val="0"/>
-              </a:spcAft>
-              <a:buNone/>
-            </a:pPr>
-            <a:r>
-              <a:t/>
-            </a:r>
-            <a:endParaRPr sz="2000">
-              <a:latin typeface="Times New Roman"/>
-              <a:ea typeface="Times New Roman"/>
-              <a:cs typeface="Times New Roman"/>
-              <a:sym typeface="Times New Roman"/>
-            </a:endParaRPr>
-          </a:p>
-        </p:txBody>
-      </p:sp>
-    </p:spTree>
-  </p:cSld>
-  <p:clrMapOvr>
-    <a:masterClrMapping/>
-  </p:clrMapOvr>
-</p:sld>
-</file>
-
-<file path=ppt/slides/slide7.xml><?xml version="1.0" encoding="utf-8"?>
-<p:sld xmlns:a="http://schemas.openxmlformats.org/drawingml/2006/main" xmlns:r="http://schemas.openxmlformats.org/officeDocument/2006/relationships" xmlns:mc="http://schemas.openxmlformats.org/markup-compatibility/2006" xmlns:mv="urn:schemas-microsoft-com:mac:vml" xmlns:p="http://schemas.openxmlformats.org/presentationml/2006/main" xmlns:c="http://schemas.openxmlformats.org/drawingml/2006/chart" xmlns:dgm="http://schemas.openxmlformats.org/drawingml/2006/diagram" xmlns:o="urn:schemas-microsoft-com:office:office" xmlns:v="urn:schemas-microsoft-com:vml" xmlns:pvml="urn:schemas-microsoft-com:office:powerpoint" xmlns:com="http://schemas.openxmlformats.org/drawingml/2006/compatibility" xmlns:p14="http://schemas.microsoft.com/office/powerpoint/2010/main" xmlns:p15="http://schemas.microsoft.com/office/powerpoint/2012/main" xmlns:ahyp="http://schemas.microsoft.com/office/drawing/2018/hyperlinkcolor">
-  <p:cSld>
-    <p:spTree>
-      <p:nvGrpSpPr>
-        <p:cNvPr id="124" name="Shape 124"/>
-        <p:cNvGrpSpPr/>
-        <p:nvPr/>
-      </p:nvGrpSpPr>
-      <p:grpSpPr>
-        <a:xfrm>
-          <a:off x="0" y="0"/>
-          <a:ext cx="0" cy="0"/>
-          <a:chOff x="0" y="0"/>
-          <a:chExt cx="0" cy="0"/>
-        </a:xfrm>
-      </p:grpSpPr>
-      <p:sp>
-        <p:nvSpPr>
-          <p:cNvPr id="125" name="Google Shape;125;g3e6813604e6_1_45"/>
-          <p:cNvSpPr txBox="1"/>
-          <p:nvPr>
-            <p:ph type="title"/>
-          </p:nvPr>
-        </p:nvSpPr>
-        <p:spPr>
-          <a:xfrm>
-            <a:off x="457200" y="0"/>
-            <a:ext cx="5028900" cy="914100"/>
-          </a:xfrm>
-          <a:prstGeom prst="rect">
-            <a:avLst/>
-          </a:prstGeom>
-        </p:spPr>
-        <p:txBody>
-          <a:bodyPr anchorCtr="0" anchor="ctr" bIns="0" lIns="0" spcFirstLastPara="1" rIns="0" wrap="square" tIns="0">
-            <a:noAutofit/>
-          </a:bodyPr>
-          <a:lstStyle/>
-          <a:p>
-            <a:pPr indent="0" lvl="0" marL="0" rtl="0" algn="l">
-              <a:spcBef>
-                <a:spcPts val="0"/>
-              </a:spcBef>
-              <a:spcAft>
-                <a:spcPts val="0"/>
-              </a:spcAft>
-              <a:buNone/>
-            </a:pPr>
-            <a:r>
-              <a:rPr lang="en-US" sz="3200">
-                <a:latin typeface="Times New Roman"/>
-                <a:ea typeface="Times New Roman"/>
-                <a:cs typeface="Times New Roman"/>
-                <a:sym typeface="Times New Roman"/>
-              </a:rPr>
-              <a:t>Machine Learning Model </a:t>
-            </a:r>
-            <a:endParaRPr sz="3200">
-              <a:latin typeface="Times New Roman"/>
-              <a:ea typeface="Times New Roman"/>
-              <a:cs typeface="Times New Roman"/>
-              <a:sym typeface="Times New Roman"/>
-            </a:endParaRPr>
-          </a:p>
-        </p:txBody>
-      </p:sp>
-      <p:sp>
-        <p:nvSpPr>
-          <p:cNvPr id="126" name="Google Shape;126;g3e6813604e6_1_45"/>
-          <p:cNvSpPr txBox="1"/>
-          <p:nvPr>
-            <p:ph idx="1" type="body"/>
-          </p:nvPr>
-        </p:nvSpPr>
-        <p:spPr>
-          <a:xfrm>
-            <a:off x="457200" y="1154001"/>
-            <a:ext cx="8229300" cy="4428000"/>
-          </a:xfrm>
-          <a:prstGeom prst="rect">
-            <a:avLst/>
-          </a:prstGeom>
-        </p:spPr>
-        <p:txBody>
-          <a:bodyPr anchorCtr="0" anchor="t" bIns="0" lIns="0" spcFirstLastPara="1" rIns="0" wrap="square" tIns="0">
-            <a:noAutofit/>
-          </a:bodyPr>
-          <a:lstStyle/>
-          <a:p>
-            <a:pPr indent="0" lvl="0" marL="0" rtl="0" algn="l">
-              <a:lnSpc>
-                <a:spcPct val="115000"/>
-              </a:lnSpc>
-              <a:spcBef>
-                <a:spcPts val="1200"/>
-              </a:spcBef>
-              <a:spcAft>
-                <a:spcPts val="0"/>
-              </a:spcAft>
-              <a:buClr>
-                <a:schemeClr val="dk1"/>
-              </a:buClr>
-              <a:buSzPts val="1100"/>
-              <a:buFont typeface="Arial"/>
-              <a:buNone/>
-            </a:pPr>
-            <a:r>
-              <a:rPr lang="en-US" sz="2000">
-                <a:latin typeface="Times New Roman"/>
-                <a:ea typeface="Times New Roman"/>
-                <a:cs typeface="Times New Roman"/>
-                <a:sym typeface="Times New Roman"/>
-              </a:rPr>
-              <a:t>A Linear Regression model was used to analyze the relationship between screen time and productivity.</a:t>
-            </a:r>
-            <a:endParaRPr sz="2000">
-              <a:latin typeface="Times New Roman"/>
-              <a:ea typeface="Times New Roman"/>
-              <a:cs typeface="Times New Roman"/>
-              <a:sym typeface="Times New Roman"/>
-            </a:endParaRPr>
-          </a:p>
-          <a:p>
-            <a:pPr indent="-355600" lvl="0" marL="457200" rtl="0" algn="l">
-              <a:lnSpc>
-                <a:spcPct val="115000"/>
-              </a:lnSpc>
-              <a:spcBef>
-                <a:spcPts val="1200"/>
-              </a:spcBef>
-              <a:spcAft>
-                <a:spcPts val="0"/>
-              </a:spcAft>
-              <a:buSzPts val="2000"/>
-              <a:buChar char="●"/>
-            </a:pPr>
-            <a:r>
-              <a:rPr lang="en-US" sz="2000">
-                <a:latin typeface="Times New Roman"/>
-                <a:ea typeface="Times New Roman"/>
-                <a:cs typeface="Times New Roman"/>
-                <a:sym typeface="Times New Roman"/>
-              </a:rPr>
-              <a:t>Model Used: </a:t>
-            </a:r>
-            <a:r>
-              <a:rPr b="1" lang="en-US" sz="2000">
-                <a:latin typeface="Times New Roman"/>
-                <a:ea typeface="Times New Roman"/>
-                <a:cs typeface="Times New Roman"/>
-                <a:sym typeface="Times New Roman"/>
-              </a:rPr>
-              <a:t>Linear Regression</a:t>
-            </a:r>
-            <a:endParaRPr b="1" sz="2000">
-              <a:latin typeface="Times New Roman"/>
-              <a:ea typeface="Times New Roman"/>
-              <a:cs typeface="Times New Roman"/>
-              <a:sym typeface="Times New Roman"/>
-            </a:endParaRPr>
-          </a:p>
-          <a:p>
-            <a:pPr indent="-355600" lvl="0" marL="457200" rtl="0" algn="l">
-              <a:lnSpc>
-                <a:spcPct val="115000"/>
-              </a:lnSpc>
-              <a:spcBef>
-                <a:spcPts val="0"/>
-              </a:spcBef>
-              <a:spcAft>
-                <a:spcPts val="0"/>
-              </a:spcAft>
-              <a:buSzPts val="2000"/>
-              <a:buFont typeface="Times New Roman"/>
-              <a:buChar char="●"/>
-            </a:pPr>
-            <a:r>
-              <a:rPr lang="en-US" sz="2000">
-                <a:latin typeface="Times New Roman"/>
-                <a:ea typeface="Times New Roman"/>
-                <a:cs typeface="Times New Roman"/>
-                <a:sym typeface="Times New Roman"/>
-              </a:rPr>
-              <a:t>Objective: Predict productivity based on screen time</a:t>
-            </a:r>
-            <a:endParaRPr sz="2000">
-              <a:latin typeface="Times New Roman"/>
-              <a:ea typeface="Times New Roman"/>
-              <a:cs typeface="Times New Roman"/>
-              <a:sym typeface="Times New Roman"/>
-            </a:endParaRPr>
-          </a:p>
-          <a:p>
-            <a:pPr indent="-355600" lvl="0" marL="457200" rtl="0" algn="l">
-              <a:lnSpc>
-                <a:spcPct val="115000"/>
-              </a:lnSpc>
-              <a:spcBef>
-                <a:spcPts val="0"/>
-              </a:spcBef>
-              <a:spcAft>
-                <a:spcPts val="0"/>
-              </a:spcAft>
-              <a:buSzPts val="2000"/>
-              <a:buFont typeface="Times New Roman"/>
-              <a:buChar char="●"/>
-            </a:pPr>
-            <a:r>
-              <a:rPr lang="en-US" sz="2000">
-                <a:latin typeface="Times New Roman"/>
-                <a:ea typeface="Times New Roman"/>
-                <a:cs typeface="Times New Roman"/>
-                <a:sym typeface="Times New Roman"/>
-              </a:rPr>
-              <a:t>Dataset Split:</a:t>
-            </a:r>
-            <a:endParaRPr sz="2000">
-              <a:latin typeface="Times New Roman"/>
-              <a:ea typeface="Times New Roman"/>
-              <a:cs typeface="Times New Roman"/>
-              <a:sym typeface="Times New Roman"/>
-            </a:endParaRPr>
-          </a:p>
-          <a:p>
-            <a:pPr indent="-355600" lvl="1" marL="914400" rtl="0" algn="l">
-              <a:lnSpc>
-                <a:spcPct val="115000"/>
-              </a:lnSpc>
-              <a:spcBef>
-                <a:spcPts val="0"/>
-              </a:spcBef>
-              <a:spcAft>
-                <a:spcPts val="0"/>
-              </a:spcAft>
-              <a:buSzPts val="2000"/>
-              <a:buFont typeface="Times New Roman"/>
-              <a:buChar char="○"/>
-            </a:pPr>
-            <a:r>
-              <a:rPr lang="en-US" sz="2000">
-                <a:latin typeface="Times New Roman"/>
-                <a:ea typeface="Times New Roman"/>
-                <a:cs typeface="Times New Roman"/>
-                <a:sym typeface="Times New Roman"/>
-              </a:rPr>
-              <a:t>80% Training Data</a:t>
-            </a:r>
-            <a:endParaRPr sz="2000">
-              <a:latin typeface="Times New Roman"/>
-              <a:ea typeface="Times New Roman"/>
-              <a:cs typeface="Times New Roman"/>
-              <a:sym typeface="Times New Roman"/>
-            </a:endParaRPr>
-          </a:p>
-          <a:p>
-            <a:pPr indent="-355600" lvl="1" marL="914400" rtl="0" algn="l">
-              <a:lnSpc>
-                <a:spcPct val="115000"/>
-              </a:lnSpc>
-              <a:spcBef>
-                <a:spcPts val="0"/>
-              </a:spcBef>
-              <a:spcAft>
-                <a:spcPts val="0"/>
-              </a:spcAft>
-              <a:buSzPts val="2000"/>
-              <a:buFont typeface="Times New Roman"/>
-              <a:buChar char="○"/>
-            </a:pPr>
-            <a:r>
-              <a:rPr lang="en-US" sz="2000">
-                <a:latin typeface="Times New Roman"/>
-                <a:ea typeface="Times New Roman"/>
-                <a:cs typeface="Times New Roman"/>
-                <a:sym typeface="Times New Roman"/>
-              </a:rPr>
-              <a:t>20% Testing Data</a:t>
-            </a:r>
-            <a:endParaRPr sz="2000">
-              <a:latin typeface="Times New Roman"/>
-              <a:ea typeface="Times New Roman"/>
-              <a:cs typeface="Times New Roman"/>
-              <a:sym typeface="Times New Roman"/>
-            </a:endParaRPr>
-          </a:p>
-          <a:p>
-            <a:pPr indent="-355600" lvl="0" marL="457200" rtl="0" algn="l">
-              <a:lnSpc>
-                <a:spcPct val="115000"/>
-              </a:lnSpc>
-              <a:spcBef>
-                <a:spcPts val="0"/>
-              </a:spcBef>
-              <a:spcAft>
-                <a:spcPts val="0"/>
-              </a:spcAft>
-              <a:buSzPts val="2000"/>
-              <a:buFont typeface="Times New Roman"/>
-              <a:buChar char="●"/>
-            </a:pPr>
-            <a:r>
-              <a:rPr lang="en-US" sz="2000">
-                <a:latin typeface="Times New Roman"/>
-                <a:ea typeface="Times New Roman"/>
-                <a:cs typeface="Times New Roman"/>
-                <a:sym typeface="Times New Roman"/>
-              </a:rPr>
-              <a:t>Model Evaluation Metrics:</a:t>
-            </a:r>
-            <a:endParaRPr sz="2000">
-              <a:latin typeface="Times New Roman"/>
-              <a:ea typeface="Times New Roman"/>
-              <a:cs typeface="Times New Roman"/>
-              <a:sym typeface="Times New Roman"/>
-            </a:endParaRPr>
-          </a:p>
-          <a:p>
-            <a:pPr indent="-355600" lvl="1" marL="914400" rtl="0" algn="l">
-              <a:lnSpc>
-                <a:spcPct val="115000"/>
-              </a:lnSpc>
-              <a:spcBef>
-                <a:spcPts val="0"/>
-              </a:spcBef>
-              <a:spcAft>
-                <a:spcPts val="0"/>
-              </a:spcAft>
-              <a:buSzPts val="2000"/>
-              <a:buFont typeface="Times New Roman"/>
-              <a:buChar char="○"/>
-            </a:pPr>
-            <a:r>
-              <a:rPr lang="en-US" sz="2000">
-                <a:latin typeface="Times New Roman"/>
-                <a:ea typeface="Times New Roman"/>
-                <a:cs typeface="Times New Roman"/>
-                <a:sym typeface="Times New Roman"/>
-              </a:rPr>
-              <a:t>Mean Squared Error (MSE)</a:t>
-            </a:r>
-            <a:endParaRPr sz="2000">
-              <a:latin typeface="Times New Roman"/>
-              <a:ea typeface="Times New Roman"/>
-              <a:cs typeface="Times New Roman"/>
-              <a:sym typeface="Times New Roman"/>
-            </a:endParaRPr>
-          </a:p>
-          <a:p>
-            <a:pPr indent="-355600" lvl="1" marL="914400" rtl="0" algn="l">
-              <a:lnSpc>
-                <a:spcPct val="115000"/>
-              </a:lnSpc>
-              <a:spcBef>
-                <a:spcPts val="0"/>
-              </a:spcBef>
-              <a:spcAft>
-                <a:spcPts val="0"/>
-              </a:spcAft>
-              <a:buSzPts val="2000"/>
-              <a:buFont typeface="Times New Roman"/>
-              <a:buChar char="○"/>
-            </a:pPr>
-            <a:r>
-              <a:rPr lang="en-US" sz="2000">
-                <a:latin typeface="Times New Roman"/>
-                <a:ea typeface="Times New Roman"/>
-                <a:cs typeface="Times New Roman"/>
-                <a:sym typeface="Times New Roman"/>
-              </a:rPr>
-              <a:t>R² Score</a:t>
-            </a:r>
-            <a:endParaRPr sz="2000">
-              <a:latin typeface="Times New Roman"/>
-              <a:ea typeface="Times New Roman"/>
-              <a:cs typeface="Times New Roman"/>
-              <a:sym typeface="Times New Roman"/>
-            </a:endParaRPr>
-          </a:p>
-          <a:p>
-            <a:pPr indent="0" lvl="0" marL="0" rtl="0" algn="l">
-              <a:lnSpc>
-                <a:spcPct val="115000"/>
-              </a:lnSpc>
-              <a:spcBef>
-                <a:spcPts val="1200"/>
-              </a:spcBef>
-              <a:spcAft>
-                <a:spcPts val="0"/>
-              </a:spcAft>
-              <a:buClr>
-                <a:schemeClr val="dk1"/>
-              </a:buClr>
-              <a:buSzPts val="1100"/>
-              <a:buFont typeface="Arial"/>
-              <a:buNone/>
-            </a:pPr>
-            <a:r>
-              <a:rPr lang="en-US" sz="2000">
-                <a:latin typeface="Times New Roman"/>
-                <a:ea typeface="Times New Roman"/>
-                <a:cs typeface="Times New Roman"/>
-                <a:sym typeface="Times New Roman"/>
-              </a:rPr>
-              <a:t>The model shows a negative relationship, indicating that increased screen time leads to lower productivity.</a:t>
             </a:r>
             <a:endParaRPr sz="2000">
               <a:latin typeface="Times New Roman"/>
@@ -16280,7 +17152,450 @@
       </p:grpSpPr>
       <p:sp>
         <p:nvSpPr>
-          <p:cNvPr id="132" name="Google Shape;132;g3e6813604e6_1_53"/>
+          <p:cNvPr id="132" name="Google Shape;132;g3e6813604e6_1_45"/>
+          <p:cNvSpPr txBox="1"/>
+          <p:nvPr>
+            <p:ph type="title"/>
+          </p:nvPr>
+        </p:nvSpPr>
+        <p:spPr>
+          <a:xfrm>
+            <a:off x="457200" y="0"/>
+            <a:ext cx="5028900" cy="914100"/>
+          </a:xfrm>
+          <a:prstGeom prst="rect">
+            <a:avLst/>
+          </a:prstGeom>
+        </p:spPr>
+        <p:txBody>
+          <a:bodyPr anchorCtr="0" anchor="ctr" bIns="0" lIns="0" spcFirstLastPara="1" rIns="0" wrap="square" tIns="0">
+            <a:noAutofit/>
+          </a:bodyPr>
+          <a:lstStyle/>
+          <a:p>
+            <a:pPr indent="0" lvl="0" marL="0" rtl="0" algn="l">
+              <a:spcBef>
+                <a:spcPts val="0"/>
+              </a:spcBef>
+              <a:spcAft>
+                <a:spcPts val="0"/>
+              </a:spcAft>
+              <a:buNone/>
+            </a:pPr>
+            <a:r>
+              <a:rPr lang="en-US" sz="3200">
+                <a:latin typeface="Times New Roman"/>
+                <a:ea typeface="Times New Roman"/>
+                <a:cs typeface="Times New Roman"/>
+                <a:sym typeface="Times New Roman"/>
+              </a:rPr>
+              <a:t>Machine Learning Model </a:t>
+            </a:r>
+            <a:endParaRPr sz="3200">
+              <a:latin typeface="Times New Roman"/>
+              <a:ea typeface="Times New Roman"/>
+              <a:cs typeface="Times New Roman"/>
+              <a:sym typeface="Times New Roman"/>
+            </a:endParaRPr>
+          </a:p>
+        </p:txBody>
+      </p:sp>
+      <p:sp>
+        <p:nvSpPr>
+          <p:cNvPr id="133" name="Google Shape;133;g3e6813604e6_1_45"/>
+          <p:cNvSpPr txBox="1"/>
+          <p:nvPr>
+            <p:ph idx="1" type="body"/>
+          </p:nvPr>
+        </p:nvSpPr>
+        <p:spPr>
+          <a:xfrm>
+            <a:off x="457200" y="1154001"/>
+            <a:ext cx="8229300" cy="4428000"/>
+          </a:xfrm>
+          <a:prstGeom prst="rect">
+            <a:avLst/>
+          </a:prstGeom>
+        </p:spPr>
+        <p:txBody>
+          <a:bodyPr anchorCtr="0" anchor="t" bIns="0" lIns="0" spcFirstLastPara="1" rIns="0" wrap="square" tIns="0">
+            <a:noAutofit/>
+          </a:bodyPr>
+          <a:lstStyle/>
+          <a:p>
+            <a:pPr indent="0" lvl="0" marL="0" rtl="0" algn="l">
+              <a:lnSpc>
+                <a:spcPct val="115000"/>
+              </a:lnSpc>
+              <a:spcBef>
+                <a:spcPts val="1200"/>
+              </a:spcBef>
+              <a:spcAft>
+                <a:spcPts val="0"/>
+              </a:spcAft>
+              <a:buClr>
+                <a:schemeClr val="dk1"/>
+              </a:buClr>
+              <a:buSzPts val="1100"/>
+              <a:buFont typeface="Arial"/>
+              <a:buNone/>
+            </a:pPr>
+            <a:r>
+              <a:rPr lang="en-US" sz="2000">
+                <a:latin typeface="Times New Roman"/>
+                <a:ea typeface="Times New Roman"/>
+                <a:cs typeface="Times New Roman"/>
+                <a:sym typeface="Times New Roman"/>
+              </a:rPr>
+              <a:t>A Linear Regression model was used to analyze the relationship between screen time and productivity.</a:t>
+            </a:r>
+            <a:endParaRPr sz="2000">
+              <a:latin typeface="Times New Roman"/>
+              <a:ea typeface="Times New Roman"/>
+              <a:cs typeface="Times New Roman"/>
+              <a:sym typeface="Times New Roman"/>
+            </a:endParaRPr>
+          </a:p>
+          <a:p>
+            <a:pPr indent="-355600" lvl="0" marL="457200" rtl="0" algn="l">
+              <a:lnSpc>
+                <a:spcPct val="115000"/>
+              </a:lnSpc>
+              <a:spcBef>
+                <a:spcPts val="1200"/>
+              </a:spcBef>
+              <a:spcAft>
+                <a:spcPts val="0"/>
+              </a:spcAft>
+              <a:buSzPts val="2000"/>
+              <a:buChar char="●"/>
+            </a:pPr>
+            <a:r>
+              <a:rPr lang="en-US" sz="2000">
+                <a:latin typeface="Times New Roman"/>
+                <a:ea typeface="Times New Roman"/>
+                <a:cs typeface="Times New Roman"/>
+                <a:sym typeface="Times New Roman"/>
+              </a:rPr>
+              <a:t>Model Used: </a:t>
+            </a:r>
+            <a:r>
+              <a:rPr b="1" lang="en-US" sz="2000">
+                <a:latin typeface="Times New Roman"/>
+                <a:ea typeface="Times New Roman"/>
+                <a:cs typeface="Times New Roman"/>
+                <a:sym typeface="Times New Roman"/>
+              </a:rPr>
+              <a:t>Linear Regression</a:t>
+            </a:r>
+            <a:endParaRPr b="1" sz="2000">
+              <a:latin typeface="Times New Roman"/>
+              <a:ea typeface="Times New Roman"/>
+              <a:cs typeface="Times New Roman"/>
+              <a:sym typeface="Times New Roman"/>
+            </a:endParaRPr>
+          </a:p>
+          <a:p>
+            <a:pPr indent="-355600" lvl="0" marL="457200" rtl="0" algn="l">
+              <a:lnSpc>
+                <a:spcPct val="115000"/>
+              </a:lnSpc>
+              <a:spcBef>
+                <a:spcPts val="0"/>
+              </a:spcBef>
+              <a:spcAft>
+                <a:spcPts val="0"/>
+              </a:spcAft>
+              <a:buSzPts val="2000"/>
+              <a:buFont typeface="Times New Roman"/>
+              <a:buChar char="●"/>
+            </a:pPr>
+            <a:r>
+              <a:rPr lang="en-US" sz="2000">
+                <a:latin typeface="Times New Roman"/>
+                <a:ea typeface="Times New Roman"/>
+                <a:cs typeface="Times New Roman"/>
+                <a:sym typeface="Times New Roman"/>
+              </a:rPr>
+              <a:t>Objective: Predict productivity based on screen time</a:t>
+            </a:r>
+            <a:endParaRPr sz="2000">
+              <a:latin typeface="Times New Roman"/>
+              <a:ea typeface="Times New Roman"/>
+              <a:cs typeface="Times New Roman"/>
+              <a:sym typeface="Times New Roman"/>
+            </a:endParaRPr>
+          </a:p>
+          <a:p>
+            <a:pPr indent="-355600" lvl="0" marL="457200" rtl="0" algn="l">
+              <a:lnSpc>
+                <a:spcPct val="115000"/>
+              </a:lnSpc>
+              <a:spcBef>
+                <a:spcPts val="0"/>
+              </a:spcBef>
+              <a:spcAft>
+                <a:spcPts val="0"/>
+              </a:spcAft>
+              <a:buSzPts val="2000"/>
+              <a:buFont typeface="Times New Roman"/>
+              <a:buChar char="●"/>
+            </a:pPr>
+            <a:r>
+              <a:rPr lang="en-US" sz="2000">
+                <a:latin typeface="Times New Roman"/>
+                <a:ea typeface="Times New Roman"/>
+                <a:cs typeface="Times New Roman"/>
+                <a:sym typeface="Times New Roman"/>
+              </a:rPr>
+              <a:t>Dataset Split:</a:t>
+            </a:r>
+            <a:endParaRPr sz="2000">
+              <a:latin typeface="Times New Roman"/>
+              <a:ea typeface="Times New Roman"/>
+              <a:cs typeface="Times New Roman"/>
+              <a:sym typeface="Times New Roman"/>
+            </a:endParaRPr>
+          </a:p>
+          <a:p>
+            <a:pPr indent="-355600" lvl="1" marL="914400" rtl="0" algn="l">
+              <a:lnSpc>
+                <a:spcPct val="115000"/>
+              </a:lnSpc>
+              <a:spcBef>
+                <a:spcPts val="0"/>
+              </a:spcBef>
+              <a:spcAft>
+                <a:spcPts val="0"/>
+              </a:spcAft>
+              <a:buSzPts val="2000"/>
+              <a:buFont typeface="Times New Roman"/>
+              <a:buChar char="○"/>
+            </a:pPr>
+            <a:r>
+              <a:rPr lang="en-US" sz="2000">
+                <a:latin typeface="Times New Roman"/>
+                <a:ea typeface="Times New Roman"/>
+                <a:cs typeface="Times New Roman"/>
+                <a:sym typeface="Times New Roman"/>
+              </a:rPr>
+              <a:t>80% Training Data</a:t>
+            </a:r>
+            <a:endParaRPr sz="2000">
+              <a:latin typeface="Times New Roman"/>
+              <a:ea typeface="Times New Roman"/>
+              <a:cs typeface="Times New Roman"/>
+              <a:sym typeface="Times New Roman"/>
+            </a:endParaRPr>
+          </a:p>
+          <a:p>
+            <a:pPr indent="-355600" lvl="1" marL="914400" rtl="0" algn="l">
+              <a:lnSpc>
+                <a:spcPct val="115000"/>
+              </a:lnSpc>
+              <a:spcBef>
+                <a:spcPts val="0"/>
+              </a:spcBef>
+              <a:spcAft>
+                <a:spcPts val="0"/>
+              </a:spcAft>
+              <a:buSzPts val="2000"/>
+              <a:buFont typeface="Times New Roman"/>
+              <a:buChar char="○"/>
+            </a:pPr>
+            <a:r>
+              <a:rPr lang="en-US" sz="2000">
+                <a:latin typeface="Times New Roman"/>
+                <a:ea typeface="Times New Roman"/>
+                <a:cs typeface="Times New Roman"/>
+                <a:sym typeface="Times New Roman"/>
+              </a:rPr>
+              <a:t>20% Testing Data</a:t>
+            </a:r>
+            <a:endParaRPr sz="2000">
+              <a:latin typeface="Times New Roman"/>
+              <a:ea typeface="Times New Roman"/>
+              <a:cs typeface="Times New Roman"/>
+              <a:sym typeface="Times New Roman"/>
+            </a:endParaRPr>
+          </a:p>
+          <a:p>
+            <a:pPr indent="-355600" lvl="0" marL="457200" rtl="0" algn="l">
+              <a:lnSpc>
+                <a:spcPct val="115000"/>
+              </a:lnSpc>
+              <a:spcBef>
+                <a:spcPts val="0"/>
+              </a:spcBef>
+              <a:spcAft>
+                <a:spcPts val="0"/>
+              </a:spcAft>
+              <a:buSzPts val="2000"/>
+              <a:buFont typeface="Times New Roman"/>
+              <a:buChar char="●"/>
+            </a:pPr>
+            <a:r>
+              <a:rPr lang="en-US" sz="2000">
+                <a:latin typeface="Times New Roman"/>
+                <a:ea typeface="Times New Roman"/>
+                <a:cs typeface="Times New Roman"/>
+                <a:sym typeface="Times New Roman"/>
+              </a:rPr>
+              <a:t>Model Evaluation Metrics:</a:t>
+            </a:r>
+            <a:endParaRPr sz="2000">
+              <a:latin typeface="Times New Roman"/>
+              <a:ea typeface="Times New Roman"/>
+              <a:cs typeface="Times New Roman"/>
+              <a:sym typeface="Times New Roman"/>
+            </a:endParaRPr>
+          </a:p>
+          <a:p>
+            <a:pPr indent="-355600" lvl="1" marL="914400" rtl="0" algn="l">
+              <a:lnSpc>
+                <a:spcPct val="115000"/>
+              </a:lnSpc>
+              <a:spcBef>
+                <a:spcPts val="0"/>
+              </a:spcBef>
+              <a:spcAft>
+                <a:spcPts val="0"/>
+              </a:spcAft>
+              <a:buSzPts val="2000"/>
+              <a:buFont typeface="Times New Roman"/>
+              <a:buChar char="○"/>
+            </a:pPr>
+            <a:r>
+              <a:rPr lang="en-US" sz="2000">
+                <a:latin typeface="Times New Roman"/>
+                <a:ea typeface="Times New Roman"/>
+                <a:cs typeface="Times New Roman"/>
+                <a:sym typeface="Times New Roman"/>
+              </a:rPr>
+              <a:t>Mean Squared Error (MSE)</a:t>
+            </a:r>
+            <a:endParaRPr sz="2000">
+              <a:latin typeface="Times New Roman"/>
+              <a:ea typeface="Times New Roman"/>
+              <a:cs typeface="Times New Roman"/>
+              <a:sym typeface="Times New Roman"/>
+            </a:endParaRPr>
+          </a:p>
+          <a:p>
+            <a:pPr indent="-355600" lvl="1" marL="914400" rtl="0" algn="l">
+              <a:lnSpc>
+                <a:spcPct val="115000"/>
+              </a:lnSpc>
+              <a:spcBef>
+                <a:spcPts val="0"/>
+              </a:spcBef>
+              <a:spcAft>
+                <a:spcPts val="0"/>
+              </a:spcAft>
+              <a:buSzPts val="2000"/>
+              <a:buFont typeface="Times New Roman"/>
+              <a:buChar char="○"/>
+            </a:pPr>
+            <a:r>
+              <a:rPr lang="en-US" sz="2000">
+                <a:latin typeface="Times New Roman"/>
+                <a:ea typeface="Times New Roman"/>
+                <a:cs typeface="Times New Roman"/>
+                <a:sym typeface="Times New Roman"/>
+              </a:rPr>
+              <a:t>R² Score</a:t>
+            </a:r>
+            <a:endParaRPr sz="2000">
+              <a:latin typeface="Times New Roman"/>
+              <a:ea typeface="Times New Roman"/>
+              <a:cs typeface="Times New Roman"/>
+              <a:sym typeface="Times New Roman"/>
+            </a:endParaRPr>
+          </a:p>
+          <a:p>
+            <a:pPr indent="0" lvl="0" marL="0" rtl="0" algn="l">
+              <a:lnSpc>
+                <a:spcPct val="115000"/>
+              </a:lnSpc>
+              <a:spcBef>
+                <a:spcPts val="1200"/>
+              </a:spcBef>
+              <a:spcAft>
+                <a:spcPts val="0"/>
+              </a:spcAft>
+              <a:buClr>
+                <a:schemeClr val="dk1"/>
+              </a:buClr>
+              <a:buSzPts val="1100"/>
+              <a:buFont typeface="Arial"/>
+              <a:buNone/>
+            </a:pPr>
+            <a:r>
+              <a:rPr lang="en-US" sz="2000">
+                <a:latin typeface="Times New Roman"/>
+                <a:ea typeface="Times New Roman"/>
+                <a:cs typeface="Times New Roman"/>
+                <a:sym typeface="Times New Roman"/>
+              </a:rPr>
+              <a:t>The model shows a negative relationship, indicating that increased screen time leads to lower productivity.</a:t>
+            </a:r>
+            <a:endParaRPr sz="2000">
+              <a:latin typeface="Times New Roman"/>
+              <a:ea typeface="Times New Roman"/>
+              <a:cs typeface="Times New Roman"/>
+              <a:sym typeface="Times New Roman"/>
+            </a:endParaRPr>
+          </a:p>
+          <a:p>
+            <a:pPr indent="0" lvl="0" marL="0" rtl="0" algn="l">
+              <a:spcBef>
+                <a:spcPts val="1200"/>
+              </a:spcBef>
+              <a:spcAft>
+                <a:spcPts val="0"/>
+              </a:spcAft>
+              <a:buNone/>
+            </a:pPr>
+            <a:r>
+              <a:t/>
+            </a:r>
+            <a:endParaRPr sz="2000">
+              <a:latin typeface="Times New Roman"/>
+              <a:ea typeface="Times New Roman"/>
+              <a:cs typeface="Times New Roman"/>
+              <a:sym typeface="Times New Roman"/>
+            </a:endParaRPr>
+          </a:p>
+        </p:txBody>
+      </p:sp>
+    </p:spTree>
+  </p:cSld>
+  <p:clrMapOvr>
+    <a:masterClrMapping/>
+  </p:clrMapOvr>
+</p:sld>
+</file>
+
+<file path=ppt/slides/slide9.xml><?xml version="1.0" encoding="utf-8"?>
+<p:sld xmlns:a="http://schemas.openxmlformats.org/drawingml/2006/main" xmlns:r="http://schemas.openxmlformats.org/officeDocument/2006/relationships" xmlns:mc="http://schemas.openxmlformats.org/markup-compatibility/2006" xmlns:mv="urn:schemas-microsoft-com:mac:vml" xmlns:p="http://schemas.openxmlformats.org/presentationml/2006/main" xmlns:c="http://schemas.openxmlformats.org/drawingml/2006/chart" xmlns:dgm="http://schemas.openxmlformats.org/drawingml/2006/diagram" xmlns:o="urn:schemas-microsoft-com:office:office" xmlns:v="urn:schemas-microsoft-com:vml" xmlns:pvml="urn:schemas-microsoft-com:office:powerpoint" xmlns:com="http://schemas.openxmlformats.org/drawingml/2006/compatibility" xmlns:p14="http://schemas.microsoft.com/office/powerpoint/2010/main" xmlns:p15="http://schemas.microsoft.com/office/powerpoint/2012/main" xmlns:ahyp="http://schemas.microsoft.com/office/drawing/2018/hyperlinkcolor">
+  <p:cSld>
+    <p:spTree>
+      <p:nvGrpSpPr>
+        <p:cNvPr id="138" name="Shape 138"/>
+        <p:cNvGrpSpPr/>
+        <p:nvPr/>
+      </p:nvGrpSpPr>
+      <p:grpSpPr>
+        <a:xfrm>
+          <a:off x="0" y="0"/>
+          <a:ext cx="0" cy="0"/>
+          <a:chOff x="0" y="0"/>
+          <a:chExt cx="0" cy="0"/>
+        </a:xfrm>
+      </p:grpSpPr>
+      <p:sp>
+        <p:nvSpPr>
+          <p:cNvPr id="139" name="Google Shape;139;g3e6813604e6_1_53"/>
           <p:cNvSpPr txBox="1"/>
           <p:nvPr>
             <p:ph type="title"/>
@@ -16330,7 +17645,7 @@
       </p:sp>
       <p:sp>
         <p:nvSpPr>
-          <p:cNvPr id="133" name="Google Shape;133;g3e6813604e6_1_53"/>
+          <p:cNvPr id="140" name="Google Shape;140;g3e6813604e6_1_53"/>
           <p:cNvSpPr txBox="1"/>
           <p:nvPr>
             <p:ph idx="1" type="body"/>
@@ -16552,7 +17867,7 @@
       </p:sp>
       <p:pic>
         <p:nvPicPr>
-          <p:cNvPr id="134" name="Google Shape;134;g3e6813604e6_1_53" title="scatterplot.png"/>
+          <p:cNvPr id="141" name="Google Shape;141;g3e6813604e6_1_53" title="scatterplot.png"/>
           <p:cNvPicPr preferRelativeResize="0"/>
           <p:nvPr/>
         </p:nvPicPr>
@@ -16580,7 +17895,7 @@
       </p:pic>
       <p:pic>
         <p:nvPicPr>
-          <p:cNvPr id="135" name="Google Shape;135;g3e6813604e6_1_53" title="bargraph.png"/>
+          <p:cNvPr id="142" name="Google Shape;142;g3e6813604e6_1_53" title="bargraph.png"/>
           <p:cNvPicPr preferRelativeResize="0"/>
           <p:nvPr/>
         </p:nvPicPr>
@@ -16608,7 +17923,7 @@
       </p:pic>
       <p:pic>
         <p:nvPicPr>
-          <p:cNvPr id="136" name="Google Shape;136;g3e6813604e6_1_53" title="piechart.png"/>
+          <p:cNvPr id="143" name="Google Shape;143;g3e6813604e6_1_53" title="piechart.png"/>
           <p:cNvPicPr preferRelativeResize="0"/>
           <p:nvPr/>
         </p:nvPicPr>
@@ -16624,421 +17939,6 @@
           <a:xfrm>
             <a:off x="6359350" y="4400975"/>
             <a:ext cx="2597059" cy="2126575"/>
-          </a:xfrm>
-          <a:prstGeom prst="rect">
-            <a:avLst/>
-          </a:prstGeom>
-          <a:noFill/>
-          <a:ln>
-            <a:noFill/>
-          </a:ln>
-        </p:spPr>
-      </p:pic>
-    </p:spTree>
-  </p:cSld>
-  <p:clrMapOvr>
-    <a:masterClrMapping/>
-  </p:clrMapOvr>
-</p:sld>
-</file>
-
-<file path=ppt/slides/slide9.xml><?xml version="1.0" encoding="utf-8"?>
-<p:sld xmlns:a="http://schemas.openxmlformats.org/drawingml/2006/main" xmlns:r="http://schemas.openxmlformats.org/officeDocument/2006/relationships" xmlns:mc="http://schemas.openxmlformats.org/markup-compatibility/2006" xmlns:mv="urn:schemas-microsoft-com:mac:vml" xmlns:p="http://schemas.openxmlformats.org/presentationml/2006/main" xmlns:c="http://schemas.openxmlformats.org/drawingml/2006/chart" xmlns:dgm="http://schemas.openxmlformats.org/drawingml/2006/diagram" xmlns:o="urn:schemas-microsoft-com:office:office" xmlns:v="urn:schemas-microsoft-com:vml" xmlns:pvml="urn:schemas-microsoft-com:office:powerpoint" xmlns:com="http://schemas.openxmlformats.org/drawingml/2006/compatibility" xmlns:p14="http://schemas.microsoft.com/office/powerpoint/2010/main" xmlns:p15="http://schemas.microsoft.com/office/powerpoint/2012/main" xmlns:ahyp="http://schemas.microsoft.com/office/drawing/2018/hyperlinkcolor">
-  <p:cSld>
-    <p:spTree>
-      <p:nvGrpSpPr>
-        <p:cNvPr id="141" name="Shape 141"/>
-        <p:cNvGrpSpPr/>
-        <p:nvPr/>
-      </p:nvGrpSpPr>
-      <p:grpSpPr>
-        <a:xfrm>
-          <a:off x="0" y="0"/>
-          <a:ext cx="0" cy="0"/>
-          <a:chOff x="0" y="0"/>
-          <a:chExt cx="0" cy="0"/>
-        </a:xfrm>
-      </p:grpSpPr>
-      <p:sp>
-        <p:nvSpPr>
-          <p:cNvPr id="142" name="Google Shape;142;g3e6813604e6_1_61"/>
-          <p:cNvSpPr txBox="1"/>
-          <p:nvPr>
-            <p:ph type="title"/>
-          </p:nvPr>
-        </p:nvSpPr>
-        <p:spPr>
-          <a:xfrm>
-            <a:off x="457200" y="439625"/>
-            <a:ext cx="5028900" cy="474300"/>
-          </a:xfrm>
-          <a:prstGeom prst="rect">
-            <a:avLst/>
-          </a:prstGeom>
-        </p:spPr>
-        <p:txBody>
-          <a:bodyPr anchorCtr="0" anchor="ctr" bIns="0" lIns="0" spcFirstLastPara="1" rIns="0" wrap="square" tIns="0">
-            <a:noAutofit/>
-          </a:bodyPr>
-          <a:lstStyle/>
-          <a:p>
-            <a:pPr indent="0" lvl="0" marL="0" rtl="0" algn="l">
-              <a:lnSpc>
-                <a:spcPct val="115000"/>
-              </a:lnSpc>
-              <a:spcBef>
-                <a:spcPts val="2400"/>
-              </a:spcBef>
-              <a:spcAft>
-                <a:spcPts val="0"/>
-              </a:spcAft>
-              <a:buClr>
-                <a:schemeClr val="dk1"/>
-              </a:buClr>
-              <a:buSzPts val="1100"/>
-              <a:buFont typeface="Arial"/>
-              <a:buNone/>
-            </a:pPr>
-            <a:r>
-              <a:rPr lang="en-US" sz="3200">
-                <a:latin typeface="Times New Roman"/>
-                <a:ea typeface="Times New Roman"/>
-                <a:cs typeface="Times New Roman"/>
-                <a:sym typeface="Times New Roman"/>
-              </a:rPr>
-              <a:t>Correlation Analysis</a:t>
-            </a:r>
-            <a:endParaRPr sz="3200">
-              <a:latin typeface="Times New Roman"/>
-              <a:ea typeface="Times New Roman"/>
-              <a:cs typeface="Times New Roman"/>
-              <a:sym typeface="Times New Roman"/>
-            </a:endParaRPr>
-          </a:p>
-          <a:p>
-            <a:pPr indent="0" lvl="0" marL="0" rtl="0" algn="l">
-              <a:spcBef>
-                <a:spcPts val="600"/>
-              </a:spcBef>
-              <a:spcAft>
-                <a:spcPts val="0"/>
-              </a:spcAft>
-              <a:buNone/>
-            </a:pPr>
-            <a:r>
-              <a:t/>
-            </a:r>
-            <a:endParaRPr sz="3200">
-              <a:latin typeface="Times New Roman"/>
-              <a:ea typeface="Times New Roman"/>
-              <a:cs typeface="Times New Roman"/>
-              <a:sym typeface="Times New Roman"/>
-            </a:endParaRPr>
-          </a:p>
-        </p:txBody>
-      </p:sp>
-      <p:sp>
-        <p:nvSpPr>
-          <p:cNvPr id="143" name="Google Shape;143;g3e6813604e6_1_61"/>
-          <p:cNvSpPr txBox="1"/>
-          <p:nvPr>
-            <p:ph idx="1" type="body"/>
-          </p:nvPr>
-        </p:nvSpPr>
-        <p:spPr>
-          <a:xfrm>
-            <a:off x="457200" y="1154001"/>
-            <a:ext cx="8229300" cy="4428000"/>
-          </a:xfrm>
-          <a:prstGeom prst="rect">
-            <a:avLst/>
-          </a:prstGeom>
-        </p:spPr>
-        <p:txBody>
-          <a:bodyPr anchorCtr="0" anchor="t" bIns="0" lIns="0" spcFirstLastPara="1" rIns="0" wrap="square" tIns="0">
-            <a:normAutofit/>
-          </a:bodyPr>
-          <a:lstStyle/>
-          <a:p>
-            <a:pPr indent="0" lvl="0" marL="0" rtl="0" algn="l">
-              <a:lnSpc>
-                <a:spcPct val="115000"/>
-              </a:lnSpc>
-              <a:spcBef>
-                <a:spcPts val="1200"/>
-              </a:spcBef>
-              <a:spcAft>
-                <a:spcPts val="0"/>
-              </a:spcAft>
-              <a:buClr>
-                <a:schemeClr val="dk1"/>
-              </a:buClr>
-              <a:buSzPts val="1100"/>
-              <a:buFont typeface="Arial"/>
-              <a:buNone/>
-            </a:pPr>
-            <a:r>
-              <a:rPr lang="en-US" sz="2000">
-                <a:latin typeface="Times New Roman"/>
-                <a:ea typeface="Times New Roman"/>
-                <a:cs typeface="Times New Roman"/>
-                <a:sym typeface="Times New Roman"/>
-              </a:rPr>
-              <a:t>Correlation analysis was performed to understand the relationship between screen time and other variables.</a:t>
-            </a:r>
-            <a:endParaRPr sz="2000">
-              <a:latin typeface="Times New Roman"/>
-              <a:ea typeface="Times New Roman"/>
-              <a:cs typeface="Times New Roman"/>
-              <a:sym typeface="Times New Roman"/>
-            </a:endParaRPr>
-          </a:p>
-          <a:p>
-            <a:pPr indent="-355600" lvl="0" marL="457200" rtl="0" algn="l">
-              <a:lnSpc>
-                <a:spcPct val="115000"/>
-              </a:lnSpc>
-              <a:spcBef>
-                <a:spcPts val="1200"/>
-              </a:spcBef>
-              <a:spcAft>
-                <a:spcPts val="0"/>
-              </a:spcAft>
-              <a:buSzPts val="2000"/>
-              <a:buFont typeface="Times New Roman"/>
-              <a:buChar char="●"/>
-            </a:pPr>
-            <a:r>
-              <a:rPr lang="en-US" sz="2000">
-                <a:latin typeface="Times New Roman"/>
-                <a:ea typeface="Times New Roman"/>
-                <a:cs typeface="Times New Roman"/>
-                <a:sym typeface="Times New Roman"/>
-              </a:rPr>
-              <a:t>Negative correlation between:</a:t>
-            </a:r>
-            <a:endParaRPr sz="2000">
-              <a:latin typeface="Times New Roman"/>
-              <a:ea typeface="Times New Roman"/>
-              <a:cs typeface="Times New Roman"/>
-              <a:sym typeface="Times New Roman"/>
-            </a:endParaRPr>
-          </a:p>
-          <a:p>
-            <a:pPr indent="-355600" lvl="1" marL="914400" rtl="0" algn="l">
-              <a:lnSpc>
-                <a:spcPct val="115000"/>
-              </a:lnSpc>
-              <a:spcBef>
-                <a:spcPts val="0"/>
-              </a:spcBef>
-              <a:spcAft>
-                <a:spcPts val="0"/>
-              </a:spcAft>
-              <a:buSzPts val="2000"/>
-              <a:buFont typeface="Times New Roman"/>
-              <a:buChar char="○"/>
-            </a:pPr>
-            <a:r>
-              <a:rPr lang="en-US" sz="2000">
-                <a:latin typeface="Times New Roman"/>
-                <a:ea typeface="Times New Roman"/>
-                <a:cs typeface="Times New Roman"/>
-                <a:sym typeface="Times New Roman"/>
-              </a:rPr>
-              <a:t>Screen Time and Productivity</a:t>
-            </a:r>
-            <a:endParaRPr sz="2000">
-              <a:latin typeface="Times New Roman"/>
-              <a:ea typeface="Times New Roman"/>
-              <a:cs typeface="Times New Roman"/>
-              <a:sym typeface="Times New Roman"/>
-            </a:endParaRPr>
-          </a:p>
-          <a:p>
-            <a:pPr indent="-355600" lvl="1" marL="914400" rtl="0" algn="l">
-              <a:lnSpc>
-                <a:spcPct val="115000"/>
-              </a:lnSpc>
-              <a:spcBef>
-                <a:spcPts val="0"/>
-              </a:spcBef>
-              <a:spcAft>
-                <a:spcPts val="0"/>
-              </a:spcAft>
-              <a:buSzPts val="2000"/>
-              <a:buFont typeface="Times New Roman"/>
-              <a:buChar char="○"/>
-            </a:pPr>
-            <a:r>
-              <a:rPr lang="en-US" sz="2000">
-                <a:latin typeface="Times New Roman"/>
-                <a:ea typeface="Times New Roman"/>
-                <a:cs typeface="Times New Roman"/>
-                <a:sym typeface="Times New Roman"/>
-              </a:rPr>
-              <a:t>Screen Time and Sleep Quality</a:t>
-            </a:r>
-            <a:endParaRPr sz="2000">
-              <a:latin typeface="Times New Roman"/>
-              <a:ea typeface="Times New Roman"/>
-              <a:cs typeface="Times New Roman"/>
-              <a:sym typeface="Times New Roman"/>
-            </a:endParaRPr>
-          </a:p>
-          <a:p>
-            <a:pPr indent="-355600" lvl="0" marL="457200" rtl="0" algn="l">
-              <a:lnSpc>
-                <a:spcPct val="115000"/>
-              </a:lnSpc>
-              <a:spcBef>
-                <a:spcPts val="0"/>
-              </a:spcBef>
-              <a:spcAft>
-                <a:spcPts val="0"/>
-              </a:spcAft>
-              <a:buSzPts val="2000"/>
-              <a:buFont typeface="Times New Roman"/>
-              <a:buChar char="●"/>
-            </a:pPr>
-            <a:r>
-              <a:rPr lang="en-US" sz="2000">
-                <a:latin typeface="Times New Roman"/>
-                <a:ea typeface="Times New Roman"/>
-                <a:cs typeface="Times New Roman"/>
-                <a:sym typeface="Times New Roman"/>
-              </a:rPr>
-              <a:t>Positive correlation between:</a:t>
-            </a:r>
-            <a:endParaRPr sz="2000">
-              <a:latin typeface="Times New Roman"/>
-              <a:ea typeface="Times New Roman"/>
-              <a:cs typeface="Times New Roman"/>
-              <a:sym typeface="Times New Roman"/>
-            </a:endParaRPr>
-          </a:p>
-          <a:p>
-            <a:pPr indent="-355600" lvl="1" marL="914400" rtl="0" algn="l">
-              <a:lnSpc>
-                <a:spcPct val="115000"/>
-              </a:lnSpc>
-              <a:spcBef>
-                <a:spcPts val="0"/>
-              </a:spcBef>
-              <a:spcAft>
-                <a:spcPts val="0"/>
-              </a:spcAft>
-              <a:buSzPts val="2000"/>
-              <a:buFont typeface="Times New Roman"/>
-              <a:buChar char="○"/>
-            </a:pPr>
-            <a:r>
-              <a:rPr lang="en-US" sz="2000">
-                <a:latin typeface="Times New Roman"/>
-                <a:ea typeface="Times New Roman"/>
-                <a:cs typeface="Times New Roman"/>
-                <a:sym typeface="Times New Roman"/>
-              </a:rPr>
-              <a:t>Screen Time and Stress Levels</a:t>
-            </a:r>
-            <a:endParaRPr sz="2000">
-              <a:latin typeface="Times New Roman"/>
-              <a:ea typeface="Times New Roman"/>
-              <a:cs typeface="Times New Roman"/>
-              <a:sym typeface="Times New Roman"/>
-            </a:endParaRPr>
-          </a:p>
-          <a:p>
-            <a:pPr indent="0" lvl="0" marL="0" rtl="0" algn="l">
-              <a:lnSpc>
-                <a:spcPct val="115000"/>
-              </a:lnSpc>
-              <a:spcBef>
-                <a:spcPts val="1200"/>
-              </a:spcBef>
-              <a:spcAft>
-                <a:spcPts val="0"/>
-              </a:spcAft>
-              <a:buClr>
-                <a:schemeClr val="dk1"/>
-              </a:buClr>
-              <a:buSzPts val="1100"/>
-              <a:buFont typeface="Arial"/>
-              <a:buNone/>
-            </a:pPr>
-            <a:r>
-              <a:rPr lang="en-US" sz="2000">
-                <a:latin typeface="Times New Roman"/>
-                <a:ea typeface="Times New Roman"/>
-                <a:cs typeface="Times New Roman"/>
-                <a:sym typeface="Times New Roman"/>
-              </a:rPr>
-              <a:t>Key Insight:</a:t>
-            </a:r>
-            <a:br>
-              <a:rPr lang="en-US" sz="2000">
-                <a:latin typeface="Times New Roman"/>
-                <a:ea typeface="Times New Roman"/>
-                <a:cs typeface="Times New Roman"/>
-                <a:sym typeface="Times New Roman"/>
-              </a:rPr>
-            </a:br>
-            <a:r>
-              <a:rPr lang="en-US" sz="2000">
-                <a:latin typeface="Times New Roman"/>
-                <a:ea typeface="Times New Roman"/>
-                <a:cs typeface="Times New Roman"/>
-                <a:sym typeface="Times New Roman"/>
-              </a:rPr>
-              <a:t>Higher screen time leads to lower productivity and sleep quality, while increasing stress levels.</a:t>
-            </a:r>
-            <a:endParaRPr sz="2000">
-              <a:latin typeface="Times New Roman"/>
-              <a:ea typeface="Times New Roman"/>
-              <a:cs typeface="Times New Roman"/>
-              <a:sym typeface="Times New Roman"/>
-            </a:endParaRPr>
-          </a:p>
-          <a:p>
-            <a:pPr indent="0" lvl="0" marL="0" rtl="0" algn="l">
-              <a:spcBef>
-                <a:spcPts val="1200"/>
-              </a:spcBef>
-              <a:spcAft>
-                <a:spcPts val="0"/>
-              </a:spcAft>
-              <a:buNone/>
-            </a:pPr>
-            <a:r>
-              <a:t/>
-            </a:r>
-            <a:endParaRPr sz="2000">
-              <a:latin typeface="Times New Roman"/>
-              <a:ea typeface="Times New Roman"/>
-              <a:cs typeface="Times New Roman"/>
-              <a:sym typeface="Times New Roman"/>
-            </a:endParaRPr>
-          </a:p>
-        </p:txBody>
-      </p:sp>
-      <p:pic>
-        <p:nvPicPr>
-          <p:cNvPr id="144" name="Google Shape;144;g3e6813604e6_1_61" title="correlationmatrix.png"/>
-          <p:cNvPicPr preferRelativeResize="0"/>
-          <p:nvPr/>
-        </p:nvPicPr>
-        <p:blipFill>
-          <a:blip r:embed="rId3">
-            <a:alphaModFix/>
-          </a:blip>
-          <a:stretch>
-            <a:fillRect/>
-          </a:stretch>
-        </p:blipFill>
-        <p:spPr>
-          <a:xfrm>
-            <a:off x="3465488" y="4867650"/>
-            <a:ext cx="2212726" cy="1737400"/>
           </a:xfrm>
           <a:prstGeom prst="rect">
             <a:avLst/>
